--- a/我全心頌讚.pptx
+++ b/我全心頌讚.pptx
@@ -5,17 +5,17 @@
     <p:sldMasterId id="2147483660" r:id="rId1"/>
   </p:sldMasterIdLst>
   <p:sldIdLst>
-    <p:sldId id="259" r:id="rId2"/>
-    <p:sldId id="260" r:id="rId3"/>
-    <p:sldId id="261" r:id="rId4"/>
-    <p:sldId id="262" r:id="rId5"/>
-    <p:sldId id="263" r:id="rId6"/>
+    <p:sldId id="1674" r:id="rId2"/>
+    <p:sldId id="1675" r:id="rId3"/>
+    <p:sldId id="1676" r:id="rId4"/>
+    <p:sldId id="1677" r:id="rId5"/>
+    <p:sldId id="1678" r:id="rId6"/>
   </p:sldIdLst>
   <p:sldSz cx="12192000" cy="6858000"/>
   <p:notesSz cx="6858000" cy="9144000"/>
   <p:defaultTextStyle>
     <a:defPPr>
-      <a:defRPr lang="zh-TW"/>
+      <a:defRPr lang="vi-VN"/>
     </a:defPPr>
     <a:lvl1pPr marL="0" algn="l" defTabSz="914400" rtl="0" eaLnBrk="1" latinLnBrk="0" hangingPunct="1">
       <a:defRPr sz="1800" kern="1200">
@@ -108,22 +108,6 @@
       </a:defRPr>
     </a:lvl9pPr>
   </p:defaultTextStyle>
-  <p:extLst>
-    <p:ext uri="{EFAFB233-063F-42B5-8137-9DF3F51BA10A}">
-      <p15:sldGuideLst xmlns:p15="http://schemas.microsoft.com/office/powerpoint/2012/main">
-        <p15:guide id="1" orient="horz" pos="2160" userDrawn="1">
-          <p15:clr>
-            <a:srgbClr val="A4A3A4"/>
-          </p15:clr>
-        </p15:guide>
-        <p15:guide id="2" pos="3840" userDrawn="1">
-          <p15:clr>
-            <a:srgbClr val="A4A3A4"/>
-          </p15:clr>
-        </p15:guide>
-      </p15:sldGuideLst>
-    </p:ext>
-  </p:extLst>
 </p:presentation>
 </file>
 
@@ -156,7 +140,7 @@
         </p:nvSpPr>
         <p:spPr>
           <a:xfrm>
-            <a:off x="914400" y="2130426"/>
+            <a:off x="914400" y="2130428"/>
             <a:ext cx="10363200" cy="1470025"/>
           </a:xfrm>
         </p:spPr>
@@ -165,8 +149,8 @@
           <a:lstStyle/>
           <a:p>
             <a:r>
-              <a:rPr lang="zh-TW" altLang="en-US" smtClean="0"/>
-              <a:t>按一下以編輯母片標題樣式</a:t>
+              <a:rPr lang="en-US" altLang="zh-TW"/>
+              <a:t>Click to edit Master title style</a:t>
             </a:r>
             <a:endParaRPr lang="zh-TW" altLang="en-US"/>
           </a:p>
@@ -201,7 +185,7 @@
                 </a:solidFill>
               </a:defRPr>
             </a:lvl1pPr>
-            <a:lvl2pPr marL="457200" indent="0" algn="ctr">
+            <a:lvl2pPr marL="609585" indent="0" algn="ctr">
               <a:buNone/>
               <a:defRPr>
                 <a:solidFill>
@@ -211,7 +195,7 @@
                 </a:solidFill>
               </a:defRPr>
             </a:lvl2pPr>
-            <a:lvl3pPr marL="914400" indent="0" algn="ctr">
+            <a:lvl3pPr marL="1219170" indent="0" algn="ctr">
               <a:buNone/>
               <a:defRPr>
                 <a:solidFill>
@@ -221,7 +205,7 @@
                 </a:solidFill>
               </a:defRPr>
             </a:lvl3pPr>
-            <a:lvl4pPr marL="1371600" indent="0" algn="ctr">
+            <a:lvl4pPr marL="1828754" indent="0" algn="ctr">
               <a:buNone/>
               <a:defRPr>
                 <a:solidFill>
@@ -231,7 +215,7 @@
                 </a:solidFill>
               </a:defRPr>
             </a:lvl4pPr>
-            <a:lvl5pPr marL="1828800" indent="0" algn="ctr">
+            <a:lvl5pPr marL="2438339" indent="0" algn="ctr">
               <a:buNone/>
               <a:defRPr>
                 <a:solidFill>
@@ -241,7 +225,7 @@
                 </a:solidFill>
               </a:defRPr>
             </a:lvl5pPr>
-            <a:lvl6pPr marL="2286000" indent="0" algn="ctr">
+            <a:lvl6pPr marL="3047924" indent="0" algn="ctr">
               <a:buNone/>
               <a:defRPr>
                 <a:solidFill>
@@ -251,7 +235,7 @@
                 </a:solidFill>
               </a:defRPr>
             </a:lvl6pPr>
-            <a:lvl7pPr marL="2743200" indent="0" algn="ctr">
+            <a:lvl7pPr marL="3657509" indent="0" algn="ctr">
               <a:buNone/>
               <a:defRPr>
                 <a:solidFill>
@@ -261,7 +245,7 @@
                 </a:solidFill>
               </a:defRPr>
             </a:lvl7pPr>
-            <a:lvl8pPr marL="3200400" indent="0" algn="ctr">
+            <a:lvl8pPr marL="4267093" indent="0" algn="ctr">
               <a:buNone/>
               <a:defRPr>
                 <a:solidFill>
@@ -271,7 +255,7 @@
                 </a:solidFill>
               </a:defRPr>
             </a:lvl8pPr>
-            <a:lvl9pPr marL="3657600" indent="0" algn="ctr">
+            <a:lvl9pPr marL="4876678" indent="0" algn="ctr">
               <a:buNone/>
               <a:defRPr>
                 <a:solidFill>
@@ -284,8 +268,8 @@
           </a:lstStyle>
           <a:p>
             <a:r>
-              <a:rPr lang="zh-TW" altLang="en-US" smtClean="0"/>
-              <a:t>按一下以編輯母片副標題樣式</a:t>
+              <a:rPr lang="en-US" altLang="zh-TW"/>
+              <a:t>Click to edit Master subtitle style</a:t>
             </a:r>
             <a:endParaRPr lang="zh-TW" altLang="en-US"/>
           </a:p>
@@ -306,12 +290,11 @@
           <a:bodyPr/>
           <a:lstStyle/>
           <a:p>
-            <a:fld id="{A1917291-EF68-49D2-BD31-EB27FFF2DA0D}" type="datetimeFigureOut">
-              <a:rPr lang="zh-TW" altLang="en-US" smtClean="0"/>
-              <a:pPr/>
-              <a:t>2023/3/18</a:t>
+            <a:fld id="{44A4FD66-1568-420A-9FCA-2F30AA624E21}" type="datetimeFigureOut">
+              <a:rPr lang="en-US" smtClean="0"/>
+              <a:t>8/3/2024</a:t>
             </a:fld>
-            <a:endParaRPr lang="zh-TW" altLang="en-US"/>
+            <a:endParaRPr lang="en-US"/>
           </a:p>
         </p:txBody>
       </p:sp>
@@ -330,7 +313,7 @@
           <a:bodyPr/>
           <a:lstStyle/>
           <a:p>
-            <a:endParaRPr lang="zh-TW" altLang="en-US"/>
+            <a:endParaRPr lang="en-US"/>
           </a:p>
         </p:txBody>
       </p:sp>
@@ -349,16 +332,20 @@
           <a:bodyPr/>
           <a:lstStyle/>
           <a:p>
-            <a:fld id="{A64ACC33-9C22-4658-8492-F5AEE7B691C7}" type="slidenum">
-              <a:rPr lang="zh-TW" altLang="en-US" smtClean="0"/>
-              <a:pPr/>
+            <a:fld id="{6C3C596C-8257-452A-9BCB-088AA8071E41}" type="slidenum">
+              <a:rPr lang="en-US" smtClean="0"/>
               <a:t>‹#›</a:t>
             </a:fld>
-            <a:endParaRPr lang="zh-TW" altLang="en-US"/>
+            <a:endParaRPr lang="en-US"/>
           </a:p>
         </p:txBody>
       </p:sp>
     </p:spTree>
+    <p:extLst>
+      <p:ext uri="{BB962C8B-B14F-4D97-AF65-F5344CB8AC3E}">
+        <p14:creationId xmlns:p14="http://schemas.microsoft.com/office/powerpoint/2010/main" val="3733157152"/>
+      </p:ext>
+    </p:extLst>
   </p:cSld>
   <p:clrMapOvr>
     <a:masterClrMapping/>
@@ -399,8 +386,8 @@
           <a:lstStyle/>
           <a:p>
             <a:r>
-              <a:rPr lang="zh-TW" altLang="en-US" smtClean="0"/>
-              <a:t>按一下以編輯母片標題樣式</a:t>
+              <a:rPr lang="en-US" altLang="zh-TW"/>
+              <a:t>Click to edit Master title style</a:t>
             </a:r>
             <a:endParaRPr lang="zh-TW" altLang="en-US"/>
           </a:p>
@@ -423,36 +410,36 @@
           <a:p>
             <a:pPr lvl="0"/>
             <a:r>
-              <a:rPr lang="zh-TW" altLang="en-US" smtClean="0"/>
-              <a:t>按一下以編輯母片文字樣式</a:t>
+              <a:rPr lang="en-US" altLang="zh-TW"/>
+              <a:t>Click to edit Master text styles</a:t>
             </a:r>
           </a:p>
           <a:p>
             <a:pPr lvl="1"/>
             <a:r>
-              <a:rPr lang="zh-TW" altLang="en-US" smtClean="0"/>
-              <a:t>第二層</a:t>
+              <a:rPr lang="en-US" altLang="zh-TW"/>
+              <a:t>Second level</a:t>
             </a:r>
           </a:p>
           <a:p>
             <a:pPr lvl="2"/>
             <a:r>
-              <a:rPr lang="zh-TW" altLang="en-US" smtClean="0"/>
-              <a:t>第三層</a:t>
+              <a:rPr lang="en-US" altLang="zh-TW"/>
+              <a:t>Third level</a:t>
             </a:r>
           </a:p>
           <a:p>
             <a:pPr lvl="3"/>
             <a:r>
-              <a:rPr lang="zh-TW" altLang="en-US" smtClean="0"/>
-              <a:t>第四層</a:t>
+              <a:rPr lang="en-US" altLang="zh-TW"/>
+              <a:t>Fourth level</a:t>
             </a:r>
           </a:p>
           <a:p>
             <a:pPr lvl="4"/>
             <a:r>
-              <a:rPr lang="zh-TW" altLang="en-US" smtClean="0"/>
-              <a:t>第五層</a:t>
+              <a:rPr lang="en-US" altLang="zh-TW"/>
+              <a:t>Fifth level</a:t>
             </a:r>
             <a:endParaRPr lang="zh-TW" altLang="en-US"/>
           </a:p>
@@ -473,12 +460,11 @@
           <a:bodyPr/>
           <a:lstStyle/>
           <a:p>
-            <a:fld id="{A1917291-EF68-49D2-BD31-EB27FFF2DA0D}" type="datetimeFigureOut">
-              <a:rPr lang="zh-TW" altLang="en-US" smtClean="0"/>
-              <a:pPr/>
-              <a:t>2023/3/18</a:t>
+            <a:fld id="{44A4FD66-1568-420A-9FCA-2F30AA624E21}" type="datetimeFigureOut">
+              <a:rPr lang="en-US" smtClean="0"/>
+              <a:t>8/3/2024</a:t>
             </a:fld>
-            <a:endParaRPr lang="zh-TW" altLang="en-US"/>
+            <a:endParaRPr lang="en-US"/>
           </a:p>
         </p:txBody>
       </p:sp>
@@ -497,7 +483,7 @@
           <a:bodyPr/>
           <a:lstStyle/>
           <a:p>
-            <a:endParaRPr lang="zh-TW" altLang="en-US"/>
+            <a:endParaRPr lang="en-US"/>
           </a:p>
         </p:txBody>
       </p:sp>
@@ -516,16 +502,20 @@
           <a:bodyPr/>
           <a:lstStyle/>
           <a:p>
-            <a:fld id="{A64ACC33-9C22-4658-8492-F5AEE7B691C7}" type="slidenum">
-              <a:rPr lang="zh-TW" altLang="en-US" smtClean="0"/>
-              <a:pPr/>
+            <a:fld id="{6C3C596C-8257-452A-9BCB-088AA8071E41}" type="slidenum">
+              <a:rPr lang="en-US" smtClean="0"/>
               <a:t>‹#›</a:t>
             </a:fld>
-            <a:endParaRPr lang="zh-TW" altLang="en-US"/>
+            <a:endParaRPr lang="en-US"/>
           </a:p>
         </p:txBody>
       </p:sp>
     </p:spTree>
+    <p:extLst>
+      <p:ext uri="{BB962C8B-B14F-4D97-AF65-F5344CB8AC3E}">
+        <p14:creationId xmlns:p14="http://schemas.microsoft.com/office/powerpoint/2010/main" val="465063003"/>
+      </p:ext>
+    </p:extLst>
   </p:cSld>
   <p:clrMapOvr>
     <a:masterClrMapping/>
@@ -571,8 +561,8 @@
           <a:lstStyle/>
           <a:p>
             <a:r>
-              <a:rPr lang="zh-TW" altLang="en-US" smtClean="0"/>
-              <a:t>按一下以編輯母片標題樣式</a:t>
+              <a:rPr lang="en-US" altLang="zh-TW"/>
+              <a:t>Click to edit Master title style</a:t>
             </a:r>
             <a:endParaRPr lang="zh-TW" altLang="en-US"/>
           </a:p>
@@ -600,36 +590,36 @@
           <a:p>
             <a:pPr lvl="0"/>
             <a:r>
-              <a:rPr lang="zh-TW" altLang="en-US" smtClean="0"/>
-              <a:t>按一下以編輯母片文字樣式</a:t>
+              <a:rPr lang="en-US" altLang="zh-TW"/>
+              <a:t>Click to edit Master text styles</a:t>
             </a:r>
           </a:p>
           <a:p>
             <a:pPr lvl="1"/>
             <a:r>
-              <a:rPr lang="zh-TW" altLang="en-US" smtClean="0"/>
-              <a:t>第二層</a:t>
+              <a:rPr lang="en-US" altLang="zh-TW"/>
+              <a:t>Second level</a:t>
             </a:r>
           </a:p>
           <a:p>
             <a:pPr lvl="2"/>
             <a:r>
-              <a:rPr lang="zh-TW" altLang="en-US" smtClean="0"/>
-              <a:t>第三層</a:t>
+              <a:rPr lang="en-US" altLang="zh-TW"/>
+              <a:t>Third level</a:t>
             </a:r>
           </a:p>
           <a:p>
             <a:pPr lvl="3"/>
             <a:r>
-              <a:rPr lang="zh-TW" altLang="en-US" smtClean="0"/>
-              <a:t>第四層</a:t>
+              <a:rPr lang="en-US" altLang="zh-TW"/>
+              <a:t>Fourth level</a:t>
             </a:r>
           </a:p>
           <a:p>
             <a:pPr lvl="4"/>
             <a:r>
-              <a:rPr lang="zh-TW" altLang="en-US" smtClean="0"/>
-              <a:t>第五層</a:t>
+              <a:rPr lang="en-US" altLang="zh-TW"/>
+              <a:t>Fifth level</a:t>
             </a:r>
             <a:endParaRPr lang="zh-TW" altLang="en-US"/>
           </a:p>
@@ -650,12 +640,11 @@
           <a:bodyPr/>
           <a:lstStyle/>
           <a:p>
-            <a:fld id="{A1917291-EF68-49D2-BD31-EB27FFF2DA0D}" type="datetimeFigureOut">
-              <a:rPr lang="zh-TW" altLang="en-US" smtClean="0"/>
-              <a:pPr/>
-              <a:t>2023/3/18</a:t>
+            <a:fld id="{44A4FD66-1568-420A-9FCA-2F30AA624E21}" type="datetimeFigureOut">
+              <a:rPr lang="en-US" smtClean="0"/>
+              <a:t>8/3/2024</a:t>
             </a:fld>
-            <a:endParaRPr lang="zh-TW" altLang="en-US"/>
+            <a:endParaRPr lang="en-US"/>
           </a:p>
         </p:txBody>
       </p:sp>
@@ -674,7 +663,7 @@
           <a:bodyPr/>
           <a:lstStyle/>
           <a:p>
-            <a:endParaRPr lang="zh-TW" altLang="en-US"/>
+            <a:endParaRPr lang="en-US"/>
           </a:p>
         </p:txBody>
       </p:sp>
@@ -693,16 +682,20 @@
           <a:bodyPr/>
           <a:lstStyle/>
           <a:p>
-            <a:fld id="{A64ACC33-9C22-4658-8492-F5AEE7B691C7}" type="slidenum">
-              <a:rPr lang="zh-TW" altLang="en-US" smtClean="0"/>
-              <a:pPr/>
+            <a:fld id="{6C3C596C-8257-452A-9BCB-088AA8071E41}" type="slidenum">
+              <a:rPr lang="en-US" smtClean="0"/>
               <a:t>‹#›</a:t>
             </a:fld>
-            <a:endParaRPr lang="zh-TW" altLang="en-US"/>
+            <a:endParaRPr lang="en-US"/>
           </a:p>
         </p:txBody>
       </p:sp>
     </p:spTree>
+    <p:extLst>
+      <p:ext uri="{BB962C8B-B14F-4D97-AF65-F5344CB8AC3E}">
+        <p14:creationId xmlns:p14="http://schemas.microsoft.com/office/powerpoint/2010/main" val="2535654046"/>
+      </p:ext>
+    </p:extLst>
   </p:cSld>
   <p:clrMapOvr>
     <a:masterClrMapping/>
@@ -743,8 +736,8 @@
           <a:lstStyle/>
           <a:p>
             <a:r>
-              <a:rPr lang="zh-TW" altLang="en-US" smtClean="0"/>
-              <a:t>按一下以編輯母片標題樣式</a:t>
+              <a:rPr lang="en-US" altLang="zh-TW"/>
+              <a:t>Click to edit Master title style</a:t>
             </a:r>
             <a:endParaRPr lang="zh-TW" altLang="en-US"/>
           </a:p>
@@ -767,36 +760,36 @@
           <a:p>
             <a:pPr lvl="0"/>
             <a:r>
-              <a:rPr lang="zh-TW" altLang="en-US" smtClean="0"/>
-              <a:t>按一下以編輯母片文字樣式</a:t>
+              <a:rPr lang="en-US" altLang="zh-TW"/>
+              <a:t>Click to edit Master text styles</a:t>
             </a:r>
           </a:p>
           <a:p>
             <a:pPr lvl="1"/>
             <a:r>
-              <a:rPr lang="zh-TW" altLang="en-US" smtClean="0"/>
-              <a:t>第二層</a:t>
+              <a:rPr lang="en-US" altLang="zh-TW"/>
+              <a:t>Second level</a:t>
             </a:r>
           </a:p>
           <a:p>
             <a:pPr lvl="2"/>
             <a:r>
-              <a:rPr lang="zh-TW" altLang="en-US" smtClean="0"/>
-              <a:t>第三層</a:t>
+              <a:rPr lang="en-US" altLang="zh-TW"/>
+              <a:t>Third level</a:t>
             </a:r>
           </a:p>
           <a:p>
             <a:pPr lvl="3"/>
             <a:r>
-              <a:rPr lang="zh-TW" altLang="en-US" smtClean="0"/>
-              <a:t>第四層</a:t>
+              <a:rPr lang="en-US" altLang="zh-TW"/>
+              <a:t>Fourth level</a:t>
             </a:r>
           </a:p>
           <a:p>
             <a:pPr lvl="4"/>
             <a:r>
-              <a:rPr lang="zh-TW" altLang="en-US" smtClean="0"/>
-              <a:t>第五層</a:t>
+              <a:rPr lang="en-US" altLang="zh-TW"/>
+              <a:t>Fifth level</a:t>
             </a:r>
             <a:endParaRPr lang="zh-TW" altLang="en-US"/>
           </a:p>
@@ -817,12 +810,11 @@
           <a:bodyPr/>
           <a:lstStyle/>
           <a:p>
-            <a:fld id="{A1917291-EF68-49D2-BD31-EB27FFF2DA0D}" type="datetimeFigureOut">
-              <a:rPr lang="zh-TW" altLang="en-US" smtClean="0"/>
-              <a:pPr/>
-              <a:t>2023/3/18</a:t>
+            <a:fld id="{44A4FD66-1568-420A-9FCA-2F30AA624E21}" type="datetimeFigureOut">
+              <a:rPr lang="en-US" smtClean="0"/>
+              <a:t>8/3/2024</a:t>
             </a:fld>
-            <a:endParaRPr lang="zh-TW" altLang="en-US"/>
+            <a:endParaRPr lang="en-US"/>
           </a:p>
         </p:txBody>
       </p:sp>
@@ -841,7 +833,7 @@
           <a:bodyPr/>
           <a:lstStyle/>
           <a:p>
-            <a:endParaRPr lang="zh-TW" altLang="en-US"/>
+            <a:endParaRPr lang="en-US"/>
           </a:p>
         </p:txBody>
       </p:sp>
@@ -860,16 +852,20 @@
           <a:bodyPr/>
           <a:lstStyle/>
           <a:p>
-            <a:fld id="{A64ACC33-9C22-4658-8492-F5AEE7B691C7}" type="slidenum">
-              <a:rPr lang="zh-TW" altLang="en-US" smtClean="0"/>
-              <a:pPr/>
+            <a:fld id="{6C3C596C-8257-452A-9BCB-088AA8071E41}" type="slidenum">
+              <a:rPr lang="en-US" smtClean="0"/>
               <a:t>‹#›</a:t>
             </a:fld>
-            <a:endParaRPr lang="zh-TW" altLang="en-US"/>
+            <a:endParaRPr lang="en-US"/>
           </a:p>
         </p:txBody>
       </p:sp>
     </p:spTree>
+    <p:extLst>
+      <p:ext uri="{BB962C8B-B14F-4D97-AF65-F5344CB8AC3E}">
+        <p14:creationId xmlns:p14="http://schemas.microsoft.com/office/powerpoint/2010/main" val="1132708637"/>
+      </p:ext>
+    </p:extLst>
   </p:cSld>
   <p:clrMapOvr>
     <a:masterClrMapping/>
@@ -914,13 +910,13 @@
           <a:bodyPr anchor="t"/>
           <a:lstStyle>
             <a:lvl1pPr algn="l">
-              <a:defRPr sz="4000" b="1" cap="all"/>
+              <a:defRPr sz="5333" b="1" cap="all"/>
             </a:lvl1pPr>
           </a:lstStyle>
           <a:p>
             <a:r>
-              <a:rPr lang="zh-TW" altLang="en-US" smtClean="0"/>
-              <a:t>按一下以編輯母片標題樣式</a:t>
+              <a:rPr lang="en-US" altLang="zh-TW"/>
+              <a:t>Click to edit Master title style</a:t>
             </a:r>
             <a:endParaRPr lang="zh-TW" altLang="en-US"/>
           </a:p>
@@ -947,7 +943,7 @@
           <a:lstStyle>
             <a:lvl1pPr marL="0" indent="0">
               <a:buNone/>
-              <a:defRPr sz="2000">
+              <a:defRPr sz="2667">
                 <a:solidFill>
                   <a:schemeClr val="tx1">
                     <a:tint val="75000"/>
@@ -955,9 +951,9 @@
                 </a:solidFill>
               </a:defRPr>
             </a:lvl1pPr>
-            <a:lvl2pPr marL="457200" indent="0">
-              <a:buNone/>
-              <a:defRPr sz="1800">
+            <a:lvl2pPr marL="609585" indent="0">
+              <a:buNone/>
+              <a:defRPr sz="2400">
                 <a:solidFill>
                   <a:schemeClr val="tx1">
                     <a:tint val="75000"/>
@@ -965,9 +961,9 @@
                 </a:solidFill>
               </a:defRPr>
             </a:lvl2pPr>
-            <a:lvl3pPr marL="914400" indent="0">
-              <a:buNone/>
-              <a:defRPr sz="1600">
+            <a:lvl3pPr marL="1219170" indent="0">
+              <a:buNone/>
+              <a:defRPr sz="2133">
                 <a:solidFill>
                   <a:schemeClr val="tx1">
                     <a:tint val="75000"/>
@@ -975,9 +971,9 @@
                 </a:solidFill>
               </a:defRPr>
             </a:lvl3pPr>
-            <a:lvl4pPr marL="1371600" indent="0">
-              <a:buNone/>
-              <a:defRPr sz="1400">
+            <a:lvl4pPr marL="1828754" indent="0">
+              <a:buNone/>
+              <a:defRPr sz="1867">
                 <a:solidFill>
                   <a:schemeClr val="tx1">
                     <a:tint val="75000"/>
@@ -985,9 +981,9 @@
                 </a:solidFill>
               </a:defRPr>
             </a:lvl4pPr>
-            <a:lvl5pPr marL="1828800" indent="0">
-              <a:buNone/>
-              <a:defRPr sz="1400">
+            <a:lvl5pPr marL="2438339" indent="0">
+              <a:buNone/>
+              <a:defRPr sz="1867">
                 <a:solidFill>
                   <a:schemeClr val="tx1">
                     <a:tint val="75000"/>
@@ -995,9 +991,9 @@
                 </a:solidFill>
               </a:defRPr>
             </a:lvl5pPr>
-            <a:lvl6pPr marL="2286000" indent="0">
-              <a:buNone/>
-              <a:defRPr sz="1400">
+            <a:lvl6pPr marL="3047924" indent="0">
+              <a:buNone/>
+              <a:defRPr sz="1867">
                 <a:solidFill>
                   <a:schemeClr val="tx1">
                     <a:tint val="75000"/>
@@ -1005,9 +1001,9 @@
                 </a:solidFill>
               </a:defRPr>
             </a:lvl6pPr>
-            <a:lvl7pPr marL="2743200" indent="0">
-              <a:buNone/>
-              <a:defRPr sz="1400">
+            <a:lvl7pPr marL="3657509" indent="0">
+              <a:buNone/>
+              <a:defRPr sz="1867">
                 <a:solidFill>
                   <a:schemeClr val="tx1">
                     <a:tint val="75000"/>
@@ -1015,9 +1011,9 @@
                 </a:solidFill>
               </a:defRPr>
             </a:lvl7pPr>
-            <a:lvl8pPr marL="3200400" indent="0">
-              <a:buNone/>
-              <a:defRPr sz="1400">
+            <a:lvl8pPr marL="4267093" indent="0">
+              <a:buNone/>
+              <a:defRPr sz="1867">
                 <a:solidFill>
                   <a:schemeClr val="tx1">
                     <a:tint val="75000"/>
@@ -1025,9 +1021,9 @@
                 </a:solidFill>
               </a:defRPr>
             </a:lvl8pPr>
-            <a:lvl9pPr marL="3657600" indent="0">
-              <a:buNone/>
-              <a:defRPr sz="1400">
+            <a:lvl9pPr marL="4876678" indent="0">
+              <a:buNone/>
+              <a:defRPr sz="1867">
                 <a:solidFill>
                   <a:schemeClr val="tx1">
                     <a:tint val="75000"/>
@@ -1039,8 +1035,8 @@
           <a:p>
             <a:pPr lvl="0"/>
             <a:r>
-              <a:rPr lang="zh-TW" altLang="en-US" smtClean="0"/>
-              <a:t>按一下以編輯母片文字樣式</a:t>
+              <a:rPr lang="en-US" altLang="zh-TW"/>
+              <a:t>Click to edit Master text styles</a:t>
             </a:r>
           </a:p>
         </p:txBody>
@@ -1060,12 +1056,11 @@
           <a:bodyPr/>
           <a:lstStyle/>
           <a:p>
-            <a:fld id="{A1917291-EF68-49D2-BD31-EB27FFF2DA0D}" type="datetimeFigureOut">
-              <a:rPr lang="zh-TW" altLang="en-US" smtClean="0"/>
-              <a:pPr/>
-              <a:t>2023/3/18</a:t>
+            <a:fld id="{44A4FD66-1568-420A-9FCA-2F30AA624E21}" type="datetimeFigureOut">
+              <a:rPr lang="en-US" smtClean="0"/>
+              <a:t>8/3/2024</a:t>
             </a:fld>
-            <a:endParaRPr lang="zh-TW" altLang="en-US"/>
+            <a:endParaRPr lang="en-US"/>
           </a:p>
         </p:txBody>
       </p:sp>
@@ -1084,7 +1079,7 @@
           <a:bodyPr/>
           <a:lstStyle/>
           <a:p>
-            <a:endParaRPr lang="zh-TW" altLang="en-US"/>
+            <a:endParaRPr lang="en-US"/>
           </a:p>
         </p:txBody>
       </p:sp>
@@ -1103,16 +1098,20 @@
           <a:bodyPr/>
           <a:lstStyle/>
           <a:p>
-            <a:fld id="{A64ACC33-9C22-4658-8492-F5AEE7B691C7}" type="slidenum">
-              <a:rPr lang="zh-TW" altLang="en-US" smtClean="0"/>
-              <a:pPr/>
+            <a:fld id="{6C3C596C-8257-452A-9BCB-088AA8071E41}" type="slidenum">
+              <a:rPr lang="en-US" smtClean="0"/>
               <a:t>‹#›</a:t>
             </a:fld>
-            <a:endParaRPr lang="zh-TW" altLang="en-US"/>
+            <a:endParaRPr lang="en-US"/>
           </a:p>
         </p:txBody>
       </p:sp>
     </p:spTree>
+    <p:extLst>
+      <p:ext uri="{BB962C8B-B14F-4D97-AF65-F5344CB8AC3E}">
+        <p14:creationId xmlns:p14="http://schemas.microsoft.com/office/powerpoint/2010/main" val="3654960142"/>
+      </p:ext>
+    </p:extLst>
   </p:cSld>
   <p:clrMapOvr>
     <a:masterClrMapping/>
@@ -1153,8 +1152,8 @@
           <a:lstStyle/>
           <a:p>
             <a:r>
-              <a:rPr lang="zh-TW" altLang="en-US" smtClean="0"/>
-              <a:t>按一下以編輯母片標題樣式</a:t>
+              <a:rPr lang="en-US" altLang="zh-TW"/>
+              <a:t>Click to edit Master title style</a:t>
             </a:r>
             <a:endParaRPr lang="zh-TW" altLang="en-US"/>
           </a:p>
@@ -1180,66 +1179,66 @@
           <a:bodyPr/>
           <a:lstStyle>
             <a:lvl1pPr>
-              <a:defRPr sz="2800"/>
+              <a:defRPr sz="3733"/>
             </a:lvl1pPr>
             <a:lvl2pPr>
-              <a:defRPr sz="2400"/>
+              <a:defRPr sz="3200"/>
             </a:lvl2pPr>
             <a:lvl3pPr>
-              <a:defRPr sz="2000"/>
+              <a:defRPr sz="2667"/>
             </a:lvl3pPr>
             <a:lvl4pPr>
-              <a:defRPr sz="1800"/>
+              <a:defRPr sz="2400"/>
             </a:lvl4pPr>
             <a:lvl5pPr>
-              <a:defRPr sz="1800"/>
+              <a:defRPr sz="2400"/>
             </a:lvl5pPr>
             <a:lvl6pPr>
-              <a:defRPr sz="1800"/>
+              <a:defRPr sz="2400"/>
             </a:lvl6pPr>
             <a:lvl7pPr>
-              <a:defRPr sz="1800"/>
+              <a:defRPr sz="2400"/>
             </a:lvl7pPr>
             <a:lvl8pPr>
-              <a:defRPr sz="1800"/>
+              <a:defRPr sz="2400"/>
             </a:lvl8pPr>
             <a:lvl9pPr>
-              <a:defRPr sz="1800"/>
+              <a:defRPr sz="2400"/>
             </a:lvl9pPr>
           </a:lstStyle>
           <a:p>
             <a:pPr lvl="0"/>
             <a:r>
-              <a:rPr lang="zh-TW" altLang="en-US" smtClean="0"/>
-              <a:t>按一下以編輯母片文字樣式</a:t>
+              <a:rPr lang="en-US" altLang="zh-TW"/>
+              <a:t>Click to edit Master text styles</a:t>
             </a:r>
           </a:p>
           <a:p>
             <a:pPr lvl="1"/>
             <a:r>
-              <a:rPr lang="zh-TW" altLang="en-US" smtClean="0"/>
-              <a:t>第二層</a:t>
+              <a:rPr lang="en-US" altLang="zh-TW"/>
+              <a:t>Second level</a:t>
             </a:r>
           </a:p>
           <a:p>
             <a:pPr lvl="2"/>
             <a:r>
-              <a:rPr lang="zh-TW" altLang="en-US" smtClean="0"/>
-              <a:t>第三層</a:t>
+              <a:rPr lang="en-US" altLang="zh-TW"/>
+              <a:t>Third level</a:t>
             </a:r>
           </a:p>
           <a:p>
             <a:pPr lvl="3"/>
             <a:r>
-              <a:rPr lang="zh-TW" altLang="en-US" smtClean="0"/>
-              <a:t>第四層</a:t>
+              <a:rPr lang="en-US" altLang="zh-TW"/>
+              <a:t>Fourth level</a:t>
             </a:r>
           </a:p>
           <a:p>
             <a:pPr lvl="4"/>
             <a:r>
-              <a:rPr lang="zh-TW" altLang="en-US" smtClean="0"/>
-              <a:t>第五層</a:t>
+              <a:rPr lang="en-US" altLang="zh-TW"/>
+              <a:t>Fifth level</a:t>
             </a:r>
             <a:endParaRPr lang="zh-TW" altLang="en-US"/>
           </a:p>
@@ -1265,66 +1264,66 @@
           <a:bodyPr/>
           <a:lstStyle>
             <a:lvl1pPr>
-              <a:defRPr sz="2800"/>
+              <a:defRPr sz="3733"/>
             </a:lvl1pPr>
             <a:lvl2pPr>
-              <a:defRPr sz="2400"/>
+              <a:defRPr sz="3200"/>
             </a:lvl2pPr>
             <a:lvl3pPr>
-              <a:defRPr sz="2000"/>
+              <a:defRPr sz="2667"/>
             </a:lvl3pPr>
             <a:lvl4pPr>
-              <a:defRPr sz="1800"/>
+              <a:defRPr sz="2400"/>
             </a:lvl4pPr>
             <a:lvl5pPr>
-              <a:defRPr sz="1800"/>
+              <a:defRPr sz="2400"/>
             </a:lvl5pPr>
             <a:lvl6pPr>
-              <a:defRPr sz="1800"/>
+              <a:defRPr sz="2400"/>
             </a:lvl6pPr>
             <a:lvl7pPr>
-              <a:defRPr sz="1800"/>
+              <a:defRPr sz="2400"/>
             </a:lvl7pPr>
             <a:lvl8pPr>
-              <a:defRPr sz="1800"/>
+              <a:defRPr sz="2400"/>
             </a:lvl8pPr>
             <a:lvl9pPr>
-              <a:defRPr sz="1800"/>
+              <a:defRPr sz="2400"/>
             </a:lvl9pPr>
           </a:lstStyle>
           <a:p>
             <a:pPr lvl="0"/>
             <a:r>
-              <a:rPr lang="zh-TW" altLang="en-US" smtClean="0"/>
-              <a:t>按一下以編輯母片文字樣式</a:t>
+              <a:rPr lang="en-US" altLang="zh-TW"/>
+              <a:t>Click to edit Master text styles</a:t>
             </a:r>
           </a:p>
           <a:p>
             <a:pPr lvl="1"/>
             <a:r>
-              <a:rPr lang="zh-TW" altLang="en-US" smtClean="0"/>
-              <a:t>第二層</a:t>
+              <a:rPr lang="en-US" altLang="zh-TW"/>
+              <a:t>Second level</a:t>
             </a:r>
           </a:p>
           <a:p>
             <a:pPr lvl="2"/>
             <a:r>
-              <a:rPr lang="zh-TW" altLang="en-US" smtClean="0"/>
-              <a:t>第三層</a:t>
+              <a:rPr lang="en-US" altLang="zh-TW"/>
+              <a:t>Third level</a:t>
             </a:r>
           </a:p>
           <a:p>
             <a:pPr lvl="3"/>
             <a:r>
-              <a:rPr lang="zh-TW" altLang="en-US" smtClean="0"/>
-              <a:t>第四層</a:t>
+              <a:rPr lang="en-US" altLang="zh-TW"/>
+              <a:t>Fourth level</a:t>
             </a:r>
           </a:p>
           <a:p>
             <a:pPr lvl="4"/>
             <a:r>
-              <a:rPr lang="zh-TW" altLang="en-US" smtClean="0"/>
-              <a:t>第五層</a:t>
+              <a:rPr lang="en-US" altLang="zh-TW"/>
+              <a:t>Fifth level</a:t>
             </a:r>
             <a:endParaRPr lang="zh-TW" altLang="en-US"/>
           </a:p>
@@ -1345,12 +1344,11 @@
           <a:bodyPr/>
           <a:lstStyle/>
           <a:p>
-            <a:fld id="{A1917291-EF68-49D2-BD31-EB27FFF2DA0D}" type="datetimeFigureOut">
-              <a:rPr lang="zh-TW" altLang="en-US" smtClean="0"/>
-              <a:pPr/>
-              <a:t>2023/3/18</a:t>
+            <a:fld id="{44A4FD66-1568-420A-9FCA-2F30AA624E21}" type="datetimeFigureOut">
+              <a:rPr lang="en-US" smtClean="0"/>
+              <a:t>8/3/2024</a:t>
             </a:fld>
-            <a:endParaRPr lang="zh-TW" altLang="en-US"/>
+            <a:endParaRPr lang="en-US"/>
           </a:p>
         </p:txBody>
       </p:sp>
@@ -1369,7 +1367,7 @@
           <a:bodyPr/>
           <a:lstStyle/>
           <a:p>
-            <a:endParaRPr lang="zh-TW" altLang="en-US"/>
+            <a:endParaRPr lang="en-US"/>
           </a:p>
         </p:txBody>
       </p:sp>
@@ -1388,16 +1386,20 @@
           <a:bodyPr/>
           <a:lstStyle/>
           <a:p>
-            <a:fld id="{A64ACC33-9C22-4658-8492-F5AEE7B691C7}" type="slidenum">
-              <a:rPr lang="zh-TW" altLang="en-US" smtClean="0"/>
-              <a:pPr/>
+            <a:fld id="{6C3C596C-8257-452A-9BCB-088AA8071E41}" type="slidenum">
+              <a:rPr lang="en-US" smtClean="0"/>
               <a:t>‹#›</a:t>
             </a:fld>
-            <a:endParaRPr lang="zh-TW" altLang="en-US"/>
+            <a:endParaRPr lang="en-US"/>
           </a:p>
         </p:txBody>
       </p:sp>
     </p:spTree>
+    <p:extLst>
+      <p:ext uri="{BB962C8B-B14F-4D97-AF65-F5344CB8AC3E}">
+        <p14:creationId xmlns:p14="http://schemas.microsoft.com/office/powerpoint/2010/main" val="3028929181"/>
+      </p:ext>
+    </p:extLst>
   </p:cSld>
   <p:clrMapOvr>
     <a:masterClrMapping/>
@@ -1442,8 +1444,8 @@
           </a:lstStyle>
           <a:p>
             <a:r>
-              <a:rPr lang="zh-TW" altLang="en-US" smtClean="0"/>
-              <a:t>按一下以編輯母片標題樣式</a:t>
+              <a:rPr lang="en-US" altLang="zh-TW"/>
+              <a:t>Click to edit Master title style</a:t>
             </a:r>
             <a:endParaRPr lang="zh-TW" altLang="en-US"/>
           </a:p>
@@ -1462,7 +1464,7 @@
         <p:spPr>
           <a:xfrm>
             <a:off x="609600" y="1535113"/>
-            <a:ext cx="5386917" cy="639762"/>
+            <a:ext cx="5386917" cy="639763"/>
           </a:xfrm>
         </p:spPr>
         <p:txBody>
@@ -1470,46 +1472,46 @@
           <a:lstStyle>
             <a:lvl1pPr marL="0" indent="0">
               <a:buNone/>
+              <a:defRPr sz="3200" b="1"/>
+            </a:lvl1pPr>
+            <a:lvl2pPr marL="609585" indent="0">
+              <a:buNone/>
+              <a:defRPr sz="2667" b="1"/>
+            </a:lvl2pPr>
+            <a:lvl3pPr marL="1219170" indent="0">
+              <a:buNone/>
               <a:defRPr sz="2400" b="1"/>
-            </a:lvl1pPr>
-            <a:lvl2pPr marL="457200" indent="0">
-              <a:buNone/>
-              <a:defRPr sz="2000" b="1"/>
-            </a:lvl2pPr>
-            <a:lvl3pPr marL="914400" indent="0">
-              <a:buNone/>
-              <a:defRPr sz="1800" b="1"/>
             </a:lvl3pPr>
-            <a:lvl4pPr marL="1371600" indent="0">
-              <a:buNone/>
-              <a:defRPr sz="1600" b="1"/>
+            <a:lvl4pPr marL="1828754" indent="0">
+              <a:buNone/>
+              <a:defRPr sz="2133" b="1"/>
             </a:lvl4pPr>
-            <a:lvl5pPr marL="1828800" indent="0">
-              <a:buNone/>
-              <a:defRPr sz="1600" b="1"/>
+            <a:lvl5pPr marL="2438339" indent="0">
+              <a:buNone/>
+              <a:defRPr sz="2133" b="1"/>
             </a:lvl5pPr>
-            <a:lvl6pPr marL="2286000" indent="0">
-              <a:buNone/>
-              <a:defRPr sz="1600" b="1"/>
+            <a:lvl6pPr marL="3047924" indent="0">
+              <a:buNone/>
+              <a:defRPr sz="2133" b="1"/>
             </a:lvl6pPr>
-            <a:lvl7pPr marL="2743200" indent="0">
-              <a:buNone/>
-              <a:defRPr sz="1600" b="1"/>
+            <a:lvl7pPr marL="3657509" indent="0">
+              <a:buNone/>
+              <a:defRPr sz="2133" b="1"/>
             </a:lvl7pPr>
-            <a:lvl8pPr marL="3200400" indent="0">
-              <a:buNone/>
-              <a:defRPr sz="1600" b="1"/>
+            <a:lvl8pPr marL="4267093" indent="0">
+              <a:buNone/>
+              <a:defRPr sz="2133" b="1"/>
             </a:lvl8pPr>
-            <a:lvl9pPr marL="3657600" indent="0">
-              <a:buNone/>
-              <a:defRPr sz="1600" b="1"/>
+            <a:lvl9pPr marL="4876678" indent="0">
+              <a:buNone/>
+              <a:defRPr sz="2133" b="1"/>
             </a:lvl9pPr>
           </a:lstStyle>
           <a:p>
             <a:pPr lvl="0"/>
             <a:r>
-              <a:rPr lang="zh-TW" altLang="en-US" smtClean="0"/>
-              <a:t>按一下以編輯母片文字樣式</a:t>
+              <a:rPr lang="en-US" altLang="zh-TW"/>
+              <a:t>Click to edit Master text styles</a:t>
             </a:r>
           </a:p>
         </p:txBody>
@@ -1534,66 +1536,66 @@
           <a:bodyPr/>
           <a:lstStyle>
             <a:lvl1pPr>
-              <a:defRPr sz="2400"/>
+              <a:defRPr sz="3200"/>
             </a:lvl1pPr>
             <a:lvl2pPr>
-              <a:defRPr sz="2000"/>
+              <a:defRPr sz="2667"/>
             </a:lvl2pPr>
             <a:lvl3pPr>
-              <a:defRPr sz="1800"/>
+              <a:defRPr sz="2400"/>
             </a:lvl3pPr>
             <a:lvl4pPr>
-              <a:defRPr sz="1600"/>
+              <a:defRPr sz="2133"/>
             </a:lvl4pPr>
             <a:lvl5pPr>
-              <a:defRPr sz="1600"/>
+              <a:defRPr sz="2133"/>
             </a:lvl5pPr>
             <a:lvl6pPr>
-              <a:defRPr sz="1600"/>
+              <a:defRPr sz="2133"/>
             </a:lvl6pPr>
             <a:lvl7pPr>
-              <a:defRPr sz="1600"/>
+              <a:defRPr sz="2133"/>
             </a:lvl7pPr>
             <a:lvl8pPr>
-              <a:defRPr sz="1600"/>
+              <a:defRPr sz="2133"/>
             </a:lvl8pPr>
             <a:lvl9pPr>
-              <a:defRPr sz="1600"/>
+              <a:defRPr sz="2133"/>
             </a:lvl9pPr>
           </a:lstStyle>
           <a:p>
             <a:pPr lvl="0"/>
             <a:r>
-              <a:rPr lang="zh-TW" altLang="en-US" smtClean="0"/>
-              <a:t>按一下以編輯母片文字樣式</a:t>
+              <a:rPr lang="en-US" altLang="zh-TW"/>
+              <a:t>Click to edit Master text styles</a:t>
             </a:r>
           </a:p>
           <a:p>
             <a:pPr lvl="1"/>
             <a:r>
-              <a:rPr lang="zh-TW" altLang="en-US" smtClean="0"/>
-              <a:t>第二層</a:t>
+              <a:rPr lang="en-US" altLang="zh-TW"/>
+              <a:t>Second level</a:t>
             </a:r>
           </a:p>
           <a:p>
             <a:pPr lvl="2"/>
             <a:r>
-              <a:rPr lang="zh-TW" altLang="en-US" smtClean="0"/>
-              <a:t>第三層</a:t>
+              <a:rPr lang="en-US" altLang="zh-TW"/>
+              <a:t>Third level</a:t>
             </a:r>
           </a:p>
           <a:p>
             <a:pPr lvl="3"/>
             <a:r>
-              <a:rPr lang="zh-TW" altLang="en-US" smtClean="0"/>
-              <a:t>第四層</a:t>
+              <a:rPr lang="en-US" altLang="zh-TW"/>
+              <a:t>Fourth level</a:t>
             </a:r>
           </a:p>
           <a:p>
             <a:pPr lvl="4"/>
             <a:r>
-              <a:rPr lang="zh-TW" altLang="en-US" smtClean="0"/>
-              <a:t>第五層</a:t>
+              <a:rPr lang="en-US" altLang="zh-TW"/>
+              <a:t>Fifth level</a:t>
             </a:r>
             <a:endParaRPr lang="zh-TW" altLang="en-US"/>
           </a:p>
@@ -1611,8 +1613,8 @@
         </p:nvSpPr>
         <p:spPr>
           <a:xfrm>
-            <a:off x="6193368" y="1535113"/>
-            <a:ext cx="5389033" cy="639762"/>
+            <a:off x="6193372" y="1535113"/>
+            <a:ext cx="5389033" cy="639763"/>
           </a:xfrm>
         </p:spPr>
         <p:txBody>
@@ -1620,46 +1622,46 @@
           <a:lstStyle>
             <a:lvl1pPr marL="0" indent="0">
               <a:buNone/>
+              <a:defRPr sz="3200" b="1"/>
+            </a:lvl1pPr>
+            <a:lvl2pPr marL="609585" indent="0">
+              <a:buNone/>
+              <a:defRPr sz="2667" b="1"/>
+            </a:lvl2pPr>
+            <a:lvl3pPr marL="1219170" indent="0">
+              <a:buNone/>
               <a:defRPr sz="2400" b="1"/>
-            </a:lvl1pPr>
-            <a:lvl2pPr marL="457200" indent="0">
-              <a:buNone/>
-              <a:defRPr sz="2000" b="1"/>
-            </a:lvl2pPr>
-            <a:lvl3pPr marL="914400" indent="0">
-              <a:buNone/>
-              <a:defRPr sz="1800" b="1"/>
             </a:lvl3pPr>
-            <a:lvl4pPr marL="1371600" indent="0">
-              <a:buNone/>
-              <a:defRPr sz="1600" b="1"/>
+            <a:lvl4pPr marL="1828754" indent="0">
+              <a:buNone/>
+              <a:defRPr sz="2133" b="1"/>
             </a:lvl4pPr>
-            <a:lvl5pPr marL="1828800" indent="0">
-              <a:buNone/>
-              <a:defRPr sz="1600" b="1"/>
+            <a:lvl5pPr marL="2438339" indent="0">
+              <a:buNone/>
+              <a:defRPr sz="2133" b="1"/>
             </a:lvl5pPr>
-            <a:lvl6pPr marL="2286000" indent="0">
-              <a:buNone/>
-              <a:defRPr sz="1600" b="1"/>
+            <a:lvl6pPr marL="3047924" indent="0">
+              <a:buNone/>
+              <a:defRPr sz="2133" b="1"/>
             </a:lvl6pPr>
-            <a:lvl7pPr marL="2743200" indent="0">
-              <a:buNone/>
-              <a:defRPr sz="1600" b="1"/>
+            <a:lvl7pPr marL="3657509" indent="0">
+              <a:buNone/>
+              <a:defRPr sz="2133" b="1"/>
             </a:lvl7pPr>
-            <a:lvl8pPr marL="3200400" indent="0">
-              <a:buNone/>
-              <a:defRPr sz="1600" b="1"/>
+            <a:lvl8pPr marL="4267093" indent="0">
+              <a:buNone/>
+              <a:defRPr sz="2133" b="1"/>
             </a:lvl8pPr>
-            <a:lvl9pPr marL="3657600" indent="0">
-              <a:buNone/>
-              <a:defRPr sz="1600" b="1"/>
+            <a:lvl9pPr marL="4876678" indent="0">
+              <a:buNone/>
+              <a:defRPr sz="2133" b="1"/>
             </a:lvl9pPr>
           </a:lstStyle>
           <a:p>
             <a:pPr lvl="0"/>
             <a:r>
-              <a:rPr lang="zh-TW" altLang="en-US" smtClean="0"/>
-              <a:t>按一下以編輯母片文字樣式</a:t>
+              <a:rPr lang="en-US" altLang="zh-TW"/>
+              <a:t>Click to edit Master text styles</a:t>
             </a:r>
           </a:p>
         </p:txBody>
@@ -1676,7 +1678,7 @@
         </p:nvSpPr>
         <p:spPr>
           <a:xfrm>
-            <a:off x="6193368" y="2174875"/>
+            <a:off x="6193372" y="2174875"/>
             <a:ext cx="5389033" cy="3951288"/>
           </a:xfrm>
         </p:spPr>
@@ -1684,66 +1686,66 @@
           <a:bodyPr/>
           <a:lstStyle>
             <a:lvl1pPr>
-              <a:defRPr sz="2400"/>
+              <a:defRPr sz="3200"/>
             </a:lvl1pPr>
             <a:lvl2pPr>
-              <a:defRPr sz="2000"/>
+              <a:defRPr sz="2667"/>
             </a:lvl2pPr>
             <a:lvl3pPr>
-              <a:defRPr sz="1800"/>
+              <a:defRPr sz="2400"/>
             </a:lvl3pPr>
             <a:lvl4pPr>
-              <a:defRPr sz="1600"/>
+              <a:defRPr sz="2133"/>
             </a:lvl4pPr>
             <a:lvl5pPr>
-              <a:defRPr sz="1600"/>
+              <a:defRPr sz="2133"/>
             </a:lvl5pPr>
             <a:lvl6pPr>
-              <a:defRPr sz="1600"/>
+              <a:defRPr sz="2133"/>
             </a:lvl6pPr>
             <a:lvl7pPr>
-              <a:defRPr sz="1600"/>
+              <a:defRPr sz="2133"/>
             </a:lvl7pPr>
             <a:lvl8pPr>
-              <a:defRPr sz="1600"/>
+              <a:defRPr sz="2133"/>
             </a:lvl8pPr>
             <a:lvl9pPr>
-              <a:defRPr sz="1600"/>
+              <a:defRPr sz="2133"/>
             </a:lvl9pPr>
           </a:lstStyle>
           <a:p>
             <a:pPr lvl="0"/>
             <a:r>
-              <a:rPr lang="zh-TW" altLang="en-US" smtClean="0"/>
-              <a:t>按一下以編輯母片文字樣式</a:t>
+              <a:rPr lang="en-US" altLang="zh-TW"/>
+              <a:t>Click to edit Master text styles</a:t>
             </a:r>
           </a:p>
           <a:p>
             <a:pPr lvl="1"/>
             <a:r>
-              <a:rPr lang="zh-TW" altLang="en-US" smtClean="0"/>
-              <a:t>第二層</a:t>
+              <a:rPr lang="en-US" altLang="zh-TW"/>
+              <a:t>Second level</a:t>
             </a:r>
           </a:p>
           <a:p>
             <a:pPr lvl="2"/>
             <a:r>
-              <a:rPr lang="zh-TW" altLang="en-US" smtClean="0"/>
-              <a:t>第三層</a:t>
+              <a:rPr lang="en-US" altLang="zh-TW"/>
+              <a:t>Third level</a:t>
             </a:r>
           </a:p>
           <a:p>
             <a:pPr lvl="3"/>
             <a:r>
-              <a:rPr lang="zh-TW" altLang="en-US" smtClean="0"/>
-              <a:t>第四層</a:t>
+              <a:rPr lang="en-US" altLang="zh-TW"/>
+              <a:t>Fourth level</a:t>
             </a:r>
           </a:p>
           <a:p>
             <a:pPr lvl="4"/>
             <a:r>
-              <a:rPr lang="zh-TW" altLang="en-US" smtClean="0"/>
-              <a:t>第五層</a:t>
+              <a:rPr lang="en-US" altLang="zh-TW"/>
+              <a:t>Fifth level</a:t>
             </a:r>
             <a:endParaRPr lang="zh-TW" altLang="en-US"/>
           </a:p>
@@ -1764,12 +1766,11 @@
           <a:bodyPr/>
           <a:lstStyle/>
           <a:p>
-            <a:fld id="{A1917291-EF68-49D2-BD31-EB27FFF2DA0D}" type="datetimeFigureOut">
-              <a:rPr lang="zh-TW" altLang="en-US" smtClean="0"/>
-              <a:pPr/>
-              <a:t>2023/3/18</a:t>
+            <a:fld id="{44A4FD66-1568-420A-9FCA-2F30AA624E21}" type="datetimeFigureOut">
+              <a:rPr lang="en-US" smtClean="0"/>
+              <a:t>8/3/2024</a:t>
             </a:fld>
-            <a:endParaRPr lang="zh-TW" altLang="en-US"/>
+            <a:endParaRPr lang="en-US"/>
           </a:p>
         </p:txBody>
       </p:sp>
@@ -1788,7 +1789,7 @@
           <a:bodyPr/>
           <a:lstStyle/>
           <a:p>
-            <a:endParaRPr lang="zh-TW" altLang="en-US"/>
+            <a:endParaRPr lang="en-US"/>
           </a:p>
         </p:txBody>
       </p:sp>
@@ -1807,16 +1808,20 @@
           <a:bodyPr/>
           <a:lstStyle/>
           <a:p>
-            <a:fld id="{A64ACC33-9C22-4658-8492-F5AEE7B691C7}" type="slidenum">
-              <a:rPr lang="zh-TW" altLang="en-US" smtClean="0"/>
-              <a:pPr/>
+            <a:fld id="{6C3C596C-8257-452A-9BCB-088AA8071E41}" type="slidenum">
+              <a:rPr lang="en-US" smtClean="0"/>
               <a:t>‹#›</a:t>
             </a:fld>
-            <a:endParaRPr lang="zh-TW" altLang="en-US"/>
+            <a:endParaRPr lang="en-US"/>
           </a:p>
         </p:txBody>
       </p:sp>
     </p:spTree>
+    <p:extLst>
+      <p:ext uri="{BB962C8B-B14F-4D97-AF65-F5344CB8AC3E}">
+        <p14:creationId xmlns:p14="http://schemas.microsoft.com/office/powerpoint/2010/main" val="2466561750"/>
+      </p:ext>
+    </p:extLst>
   </p:cSld>
   <p:clrMapOvr>
     <a:masterClrMapping/>
@@ -1857,8 +1862,8 @@
           <a:lstStyle/>
           <a:p>
             <a:r>
-              <a:rPr lang="zh-TW" altLang="en-US" smtClean="0"/>
-              <a:t>按一下以編輯母片標題樣式</a:t>
+              <a:rPr lang="en-US" altLang="zh-TW"/>
+              <a:t>Click to edit Master title style</a:t>
             </a:r>
             <a:endParaRPr lang="zh-TW" altLang="en-US"/>
           </a:p>
@@ -1879,12 +1884,11 @@
           <a:bodyPr/>
           <a:lstStyle/>
           <a:p>
-            <a:fld id="{A1917291-EF68-49D2-BD31-EB27FFF2DA0D}" type="datetimeFigureOut">
-              <a:rPr lang="zh-TW" altLang="en-US" smtClean="0"/>
-              <a:pPr/>
-              <a:t>2023/3/18</a:t>
+            <a:fld id="{44A4FD66-1568-420A-9FCA-2F30AA624E21}" type="datetimeFigureOut">
+              <a:rPr lang="en-US" smtClean="0"/>
+              <a:t>8/3/2024</a:t>
             </a:fld>
-            <a:endParaRPr lang="zh-TW" altLang="en-US"/>
+            <a:endParaRPr lang="en-US"/>
           </a:p>
         </p:txBody>
       </p:sp>
@@ -1903,7 +1907,7 @@
           <a:bodyPr/>
           <a:lstStyle/>
           <a:p>
-            <a:endParaRPr lang="zh-TW" altLang="en-US"/>
+            <a:endParaRPr lang="en-US"/>
           </a:p>
         </p:txBody>
       </p:sp>
@@ -1922,16 +1926,20 @@
           <a:bodyPr/>
           <a:lstStyle/>
           <a:p>
-            <a:fld id="{A64ACC33-9C22-4658-8492-F5AEE7B691C7}" type="slidenum">
-              <a:rPr lang="zh-TW" altLang="en-US" smtClean="0"/>
-              <a:pPr/>
+            <a:fld id="{6C3C596C-8257-452A-9BCB-088AA8071E41}" type="slidenum">
+              <a:rPr lang="en-US" smtClean="0"/>
               <a:t>‹#›</a:t>
             </a:fld>
-            <a:endParaRPr lang="zh-TW" altLang="en-US"/>
+            <a:endParaRPr lang="en-US"/>
           </a:p>
         </p:txBody>
       </p:sp>
     </p:spTree>
+    <p:extLst>
+      <p:ext uri="{BB962C8B-B14F-4D97-AF65-F5344CB8AC3E}">
+        <p14:creationId xmlns:p14="http://schemas.microsoft.com/office/powerpoint/2010/main" val="878188160"/>
+      </p:ext>
+    </p:extLst>
   </p:cSld>
   <p:clrMapOvr>
     <a:masterClrMapping/>
@@ -1971,12 +1979,11 @@
           <a:bodyPr/>
           <a:lstStyle/>
           <a:p>
-            <a:fld id="{A1917291-EF68-49D2-BD31-EB27FFF2DA0D}" type="datetimeFigureOut">
-              <a:rPr lang="zh-TW" altLang="en-US" smtClean="0"/>
-              <a:pPr/>
-              <a:t>2023/3/18</a:t>
+            <a:fld id="{44A4FD66-1568-420A-9FCA-2F30AA624E21}" type="datetimeFigureOut">
+              <a:rPr lang="en-US" smtClean="0"/>
+              <a:t>8/3/2024</a:t>
             </a:fld>
-            <a:endParaRPr lang="zh-TW" altLang="en-US"/>
+            <a:endParaRPr lang="en-US"/>
           </a:p>
         </p:txBody>
       </p:sp>
@@ -1995,7 +2002,7 @@
           <a:bodyPr/>
           <a:lstStyle/>
           <a:p>
-            <a:endParaRPr lang="zh-TW" altLang="en-US"/>
+            <a:endParaRPr lang="en-US"/>
           </a:p>
         </p:txBody>
       </p:sp>
@@ -2014,16 +2021,20 @@
           <a:bodyPr/>
           <a:lstStyle/>
           <a:p>
-            <a:fld id="{A64ACC33-9C22-4658-8492-F5AEE7B691C7}" type="slidenum">
-              <a:rPr lang="zh-TW" altLang="en-US" smtClean="0"/>
-              <a:pPr/>
+            <a:fld id="{6C3C596C-8257-452A-9BCB-088AA8071E41}" type="slidenum">
+              <a:rPr lang="en-US" smtClean="0"/>
               <a:t>‹#›</a:t>
             </a:fld>
-            <a:endParaRPr lang="zh-TW" altLang="en-US"/>
+            <a:endParaRPr lang="en-US"/>
           </a:p>
         </p:txBody>
       </p:sp>
     </p:spTree>
+    <p:extLst>
+      <p:ext uri="{BB962C8B-B14F-4D97-AF65-F5344CB8AC3E}">
+        <p14:creationId xmlns:p14="http://schemas.microsoft.com/office/powerpoint/2010/main" val="3188732960"/>
+      </p:ext>
+    </p:extLst>
   </p:cSld>
   <p:clrMapOvr>
     <a:masterClrMapping/>
@@ -2060,21 +2071,21 @@
         </p:nvSpPr>
         <p:spPr>
           <a:xfrm>
-            <a:off x="609601" y="273050"/>
-            <a:ext cx="4011084" cy="1162050"/>
+            <a:off x="609603" y="273049"/>
+            <a:ext cx="4011084" cy="1162051"/>
           </a:xfrm>
         </p:spPr>
         <p:txBody>
           <a:bodyPr anchor="b"/>
           <a:lstStyle>
             <a:lvl1pPr algn="l">
-              <a:defRPr sz="2000" b="1"/>
+              <a:defRPr sz="2667" b="1"/>
             </a:lvl1pPr>
           </a:lstStyle>
           <a:p>
             <a:r>
-              <a:rPr lang="zh-TW" altLang="en-US" smtClean="0"/>
-              <a:t>按一下以編輯母片標題樣式</a:t>
+              <a:rPr lang="en-US" altLang="zh-TW"/>
+              <a:t>Click to edit Master title style</a:t>
             </a:r>
             <a:endParaRPr lang="zh-TW" altLang="en-US"/>
           </a:p>
@@ -2092,7 +2103,7 @@
         </p:nvSpPr>
         <p:spPr>
           <a:xfrm>
-            <a:off x="4766733" y="273051"/>
+            <a:off x="4766733" y="273053"/>
             <a:ext cx="6815667" cy="5853113"/>
           </a:xfrm>
         </p:spPr>
@@ -2100,66 +2111,66 @@
           <a:bodyPr/>
           <a:lstStyle>
             <a:lvl1pPr>
-              <a:defRPr sz="3200"/>
+              <a:defRPr sz="4267"/>
             </a:lvl1pPr>
             <a:lvl2pPr>
-              <a:defRPr sz="2800"/>
+              <a:defRPr sz="3733"/>
             </a:lvl2pPr>
             <a:lvl3pPr>
-              <a:defRPr sz="2400"/>
+              <a:defRPr sz="3200"/>
             </a:lvl3pPr>
             <a:lvl4pPr>
-              <a:defRPr sz="2000"/>
+              <a:defRPr sz="2667"/>
             </a:lvl4pPr>
             <a:lvl5pPr>
-              <a:defRPr sz="2000"/>
+              <a:defRPr sz="2667"/>
             </a:lvl5pPr>
             <a:lvl6pPr>
-              <a:defRPr sz="2000"/>
+              <a:defRPr sz="2667"/>
             </a:lvl6pPr>
             <a:lvl7pPr>
-              <a:defRPr sz="2000"/>
+              <a:defRPr sz="2667"/>
             </a:lvl7pPr>
             <a:lvl8pPr>
-              <a:defRPr sz="2000"/>
+              <a:defRPr sz="2667"/>
             </a:lvl8pPr>
             <a:lvl9pPr>
-              <a:defRPr sz="2000"/>
+              <a:defRPr sz="2667"/>
             </a:lvl9pPr>
           </a:lstStyle>
           <a:p>
             <a:pPr lvl="0"/>
             <a:r>
-              <a:rPr lang="zh-TW" altLang="en-US" smtClean="0"/>
-              <a:t>按一下以編輯母片文字樣式</a:t>
+              <a:rPr lang="en-US" altLang="zh-TW"/>
+              <a:t>Click to edit Master text styles</a:t>
             </a:r>
           </a:p>
           <a:p>
             <a:pPr lvl="1"/>
             <a:r>
-              <a:rPr lang="zh-TW" altLang="en-US" smtClean="0"/>
-              <a:t>第二層</a:t>
+              <a:rPr lang="en-US" altLang="zh-TW"/>
+              <a:t>Second level</a:t>
             </a:r>
           </a:p>
           <a:p>
             <a:pPr lvl="2"/>
             <a:r>
-              <a:rPr lang="zh-TW" altLang="en-US" smtClean="0"/>
-              <a:t>第三層</a:t>
+              <a:rPr lang="en-US" altLang="zh-TW"/>
+              <a:t>Third level</a:t>
             </a:r>
           </a:p>
           <a:p>
             <a:pPr lvl="3"/>
             <a:r>
-              <a:rPr lang="zh-TW" altLang="en-US" smtClean="0"/>
-              <a:t>第四層</a:t>
+              <a:rPr lang="en-US" altLang="zh-TW"/>
+              <a:t>Fourth level</a:t>
             </a:r>
           </a:p>
           <a:p>
             <a:pPr lvl="4"/>
             <a:r>
-              <a:rPr lang="zh-TW" altLang="en-US" smtClean="0"/>
-              <a:t>第五層</a:t>
+              <a:rPr lang="en-US" altLang="zh-TW"/>
+              <a:t>Fifth level</a:t>
             </a:r>
             <a:endParaRPr lang="zh-TW" altLang="en-US"/>
           </a:p>
@@ -2177,7 +2188,7 @@
         </p:nvSpPr>
         <p:spPr>
           <a:xfrm>
-            <a:off x="609601" y="1435101"/>
+            <a:off x="609603" y="1435103"/>
             <a:ext cx="4011084" cy="4691063"/>
           </a:xfrm>
         </p:spPr>
@@ -2186,46 +2197,46 @@
           <a:lstStyle>
             <a:lvl1pPr marL="0" indent="0">
               <a:buNone/>
-              <a:defRPr sz="1400"/>
+              <a:defRPr sz="1867"/>
             </a:lvl1pPr>
-            <a:lvl2pPr marL="457200" indent="0">
+            <a:lvl2pPr marL="609585" indent="0">
+              <a:buNone/>
+              <a:defRPr sz="1600"/>
+            </a:lvl2pPr>
+            <a:lvl3pPr marL="1219170" indent="0">
+              <a:buNone/>
+              <a:defRPr sz="1333"/>
+            </a:lvl3pPr>
+            <a:lvl4pPr marL="1828754" indent="0">
               <a:buNone/>
               <a:defRPr sz="1200"/>
-            </a:lvl2pPr>
-            <a:lvl3pPr marL="914400" indent="0">
-              <a:buNone/>
-              <a:defRPr sz="1000"/>
-            </a:lvl3pPr>
-            <a:lvl4pPr marL="1371600" indent="0">
-              <a:buNone/>
-              <a:defRPr sz="900"/>
             </a:lvl4pPr>
-            <a:lvl5pPr marL="1828800" indent="0">
-              <a:buNone/>
-              <a:defRPr sz="900"/>
+            <a:lvl5pPr marL="2438339" indent="0">
+              <a:buNone/>
+              <a:defRPr sz="1200"/>
             </a:lvl5pPr>
-            <a:lvl6pPr marL="2286000" indent="0">
-              <a:buNone/>
-              <a:defRPr sz="900"/>
+            <a:lvl6pPr marL="3047924" indent="0">
+              <a:buNone/>
+              <a:defRPr sz="1200"/>
             </a:lvl6pPr>
-            <a:lvl7pPr marL="2743200" indent="0">
-              <a:buNone/>
-              <a:defRPr sz="900"/>
+            <a:lvl7pPr marL="3657509" indent="0">
+              <a:buNone/>
+              <a:defRPr sz="1200"/>
             </a:lvl7pPr>
-            <a:lvl8pPr marL="3200400" indent="0">
-              <a:buNone/>
-              <a:defRPr sz="900"/>
+            <a:lvl8pPr marL="4267093" indent="0">
+              <a:buNone/>
+              <a:defRPr sz="1200"/>
             </a:lvl8pPr>
-            <a:lvl9pPr marL="3657600" indent="0">
-              <a:buNone/>
-              <a:defRPr sz="900"/>
+            <a:lvl9pPr marL="4876678" indent="0">
+              <a:buNone/>
+              <a:defRPr sz="1200"/>
             </a:lvl9pPr>
           </a:lstStyle>
           <a:p>
             <a:pPr lvl="0"/>
             <a:r>
-              <a:rPr lang="zh-TW" altLang="en-US" smtClean="0"/>
-              <a:t>按一下以編輯母片文字樣式</a:t>
+              <a:rPr lang="en-US" altLang="zh-TW"/>
+              <a:t>Click to edit Master text styles</a:t>
             </a:r>
           </a:p>
         </p:txBody>
@@ -2245,12 +2256,11 @@
           <a:bodyPr/>
           <a:lstStyle/>
           <a:p>
-            <a:fld id="{A1917291-EF68-49D2-BD31-EB27FFF2DA0D}" type="datetimeFigureOut">
-              <a:rPr lang="zh-TW" altLang="en-US" smtClean="0"/>
-              <a:pPr/>
-              <a:t>2023/3/18</a:t>
+            <a:fld id="{44A4FD66-1568-420A-9FCA-2F30AA624E21}" type="datetimeFigureOut">
+              <a:rPr lang="en-US" smtClean="0"/>
+              <a:t>8/3/2024</a:t>
             </a:fld>
-            <a:endParaRPr lang="zh-TW" altLang="en-US"/>
+            <a:endParaRPr lang="en-US"/>
           </a:p>
         </p:txBody>
       </p:sp>
@@ -2269,7 +2279,7 @@
           <a:bodyPr/>
           <a:lstStyle/>
           <a:p>
-            <a:endParaRPr lang="zh-TW" altLang="en-US"/>
+            <a:endParaRPr lang="en-US"/>
           </a:p>
         </p:txBody>
       </p:sp>
@@ -2288,16 +2298,20 @@
           <a:bodyPr/>
           <a:lstStyle/>
           <a:p>
-            <a:fld id="{A64ACC33-9C22-4658-8492-F5AEE7B691C7}" type="slidenum">
-              <a:rPr lang="zh-TW" altLang="en-US" smtClean="0"/>
-              <a:pPr/>
+            <a:fld id="{6C3C596C-8257-452A-9BCB-088AA8071E41}" type="slidenum">
+              <a:rPr lang="en-US" smtClean="0"/>
               <a:t>‹#›</a:t>
             </a:fld>
-            <a:endParaRPr lang="zh-TW" altLang="en-US"/>
+            <a:endParaRPr lang="en-US"/>
           </a:p>
         </p:txBody>
       </p:sp>
     </p:spTree>
+    <p:extLst>
+      <p:ext uri="{BB962C8B-B14F-4D97-AF65-F5344CB8AC3E}">
+        <p14:creationId xmlns:p14="http://schemas.microsoft.com/office/powerpoint/2010/main" val="2217761025"/>
+      </p:ext>
+    </p:extLst>
   </p:cSld>
   <p:clrMapOvr>
     <a:masterClrMapping/>
@@ -2334,21 +2348,21 @@
         </p:nvSpPr>
         <p:spPr>
           <a:xfrm>
-            <a:off x="2389717" y="4800600"/>
-            <a:ext cx="7315200" cy="566738"/>
+            <a:off x="2389717" y="4800601"/>
+            <a:ext cx="7315200" cy="566739"/>
           </a:xfrm>
         </p:spPr>
         <p:txBody>
           <a:bodyPr anchor="b"/>
           <a:lstStyle>
             <a:lvl1pPr algn="l">
-              <a:defRPr sz="2000" b="1"/>
+              <a:defRPr sz="2667" b="1"/>
             </a:lvl1pPr>
           </a:lstStyle>
           <a:p>
             <a:r>
-              <a:rPr lang="zh-TW" altLang="en-US" smtClean="0"/>
-              <a:t>按一下以編輯母片標題樣式</a:t>
+              <a:rPr lang="en-US" altLang="zh-TW"/>
+              <a:t>Click to edit Master title style</a:t>
             </a:r>
             <a:endParaRPr lang="zh-TW" altLang="en-US"/>
           </a:p>
@@ -2375,45 +2389,45 @@
           <a:lstStyle>
             <a:lvl1pPr marL="0" indent="0">
               <a:buNone/>
+              <a:defRPr sz="4267"/>
+            </a:lvl1pPr>
+            <a:lvl2pPr marL="609585" indent="0">
+              <a:buNone/>
+              <a:defRPr sz="3733"/>
+            </a:lvl2pPr>
+            <a:lvl3pPr marL="1219170" indent="0">
+              <a:buNone/>
               <a:defRPr sz="3200"/>
-            </a:lvl1pPr>
-            <a:lvl2pPr marL="457200" indent="0">
-              <a:buNone/>
-              <a:defRPr sz="2800"/>
-            </a:lvl2pPr>
-            <a:lvl3pPr marL="914400" indent="0">
-              <a:buNone/>
-              <a:defRPr sz="2400"/>
             </a:lvl3pPr>
-            <a:lvl4pPr marL="1371600" indent="0">
-              <a:buNone/>
-              <a:defRPr sz="2000"/>
+            <a:lvl4pPr marL="1828754" indent="0">
+              <a:buNone/>
+              <a:defRPr sz="2667"/>
             </a:lvl4pPr>
-            <a:lvl5pPr marL="1828800" indent="0">
-              <a:buNone/>
-              <a:defRPr sz="2000"/>
+            <a:lvl5pPr marL="2438339" indent="0">
+              <a:buNone/>
+              <a:defRPr sz="2667"/>
             </a:lvl5pPr>
-            <a:lvl6pPr marL="2286000" indent="0">
-              <a:buNone/>
-              <a:defRPr sz="2000"/>
+            <a:lvl6pPr marL="3047924" indent="0">
+              <a:buNone/>
+              <a:defRPr sz="2667"/>
             </a:lvl6pPr>
-            <a:lvl7pPr marL="2743200" indent="0">
-              <a:buNone/>
-              <a:defRPr sz="2000"/>
+            <a:lvl7pPr marL="3657509" indent="0">
+              <a:buNone/>
+              <a:defRPr sz="2667"/>
             </a:lvl7pPr>
-            <a:lvl8pPr marL="3200400" indent="0">
-              <a:buNone/>
-              <a:defRPr sz="2000"/>
+            <a:lvl8pPr marL="4267093" indent="0">
+              <a:buNone/>
+              <a:defRPr sz="2667"/>
             </a:lvl8pPr>
-            <a:lvl9pPr marL="3657600" indent="0">
-              <a:buNone/>
-              <a:defRPr sz="2000"/>
+            <a:lvl9pPr marL="4876678" indent="0">
+              <a:buNone/>
+              <a:defRPr sz="2667"/>
             </a:lvl9pPr>
           </a:lstStyle>
           <a:p>
             <a:r>
-              <a:rPr lang="zh-TW" altLang="en-US" smtClean="0"/>
-              <a:t>按一下圖示以新增圖片</a:t>
+              <a:rPr lang="en-US" altLang="zh-TW"/>
+              <a:t>Click icon to add picture</a:t>
             </a:r>
             <a:endParaRPr lang="zh-TW" altLang="en-US"/>
           </a:p>
@@ -2431,8 +2445,8 @@
         </p:nvSpPr>
         <p:spPr>
           <a:xfrm>
-            <a:off x="2389717" y="5367338"/>
-            <a:ext cx="7315200" cy="804862"/>
+            <a:off x="2389717" y="5367339"/>
+            <a:ext cx="7315200" cy="804863"/>
           </a:xfrm>
         </p:spPr>
         <p:txBody>
@@ -2440,46 +2454,46 @@
           <a:lstStyle>
             <a:lvl1pPr marL="0" indent="0">
               <a:buNone/>
-              <a:defRPr sz="1400"/>
+              <a:defRPr sz="1867"/>
             </a:lvl1pPr>
-            <a:lvl2pPr marL="457200" indent="0">
+            <a:lvl2pPr marL="609585" indent="0">
+              <a:buNone/>
+              <a:defRPr sz="1600"/>
+            </a:lvl2pPr>
+            <a:lvl3pPr marL="1219170" indent="0">
+              <a:buNone/>
+              <a:defRPr sz="1333"/>
+            </a:lvl3pPr>
+            <a:lvl4pPr marL="1828754" indent="0">
               <a:buNone/>
               <a:defRPr sz="1200"/>
-            </a:lvl2pPr>
-            <a:lvl3pPr marL="914400" indent="0">
-              <a:buNone/>
-              <a:defRPr sz="1000"/>
-            </a:lvl3pPr>
-            <a:lvl4pPr marL="1371600" indent="0">
-              <a:buNone/>
-              <a:defRPr sz="900"/>
             </a:lvl4pPr>
-            <a:lvl5pPr marL="1828800" indent="0">
-              <a:buNone/>
-              <a:defRPr sz="900"/>
+            <a:lvl5pPr marL="2438339" indent="0">
+              <a:buNone/>
+              <a:defRPr sz="1200"/>
             </a:lvl5pPr>
-            <a:lvl6pPr marL="2286000" indent="0">
-              <a:buNone/>
-              <a:defRPr sz="900"/>
+            <a:lvl6pPr marL="3047924" indent="0">
+              <a:buNone/>
+              <a:defRPr sz="1200"/>
             </a:lvl6pPr>
-            <a:lvl7pPr marL="2743200" indent="0">
-              <a:buNone/>
-              <a:defRPr sz="900"/>
+            <a:lvl7pPr marL="3657509" indent="0">
+              <a:buNone/>
+              <a:defRPr sz="1200"/>
             </a:lvl7pPr>
-            <a:lvl8pPr marL="3200400" indent="0">
-              <a:buNone/>
-              <a:defRPr sz="900"/>
+            <a:lvl8pPr marL="4267093" indent="0">
+              <a:buNone/>
+              <a:defRPr sz="1200"/>
             </a:lvl8pPr>
-            <a:lvl9pPr marL="3657600" indent="0">
-              <a:buNone/>
-              <a:defRPr sz="900"/>
+            <a:lvl9pPr marL="4876678" indent="0">
+              <a:buNone/>
+              <a:defRPr sz="1200"/>
             </a:lvl9pPr>
           </a:lstStyle>
           <a:p>
             <a:pPr lvl="0"/>
             <a:r>
-              <a:rPr lang="zh-TW" altLang="en-US" smtClean="0"/>
-              <a:t>按一下以編輯母片文字樣式</a:t>
+              <a:rPr lang="en-US" altLang="zh-TW"/>
+              <a:t>Click to edit Master text styles</a:t>
             </a:r>
           </a:p>
         </p:txBody>
@@ -2499,12 +2513,11 @@
           <a:bodyPr/>
           <a:lstStyle/>
           <a:p>
-            <a:fld id="{A1917291-EF68-49D2-BD31-EB27FFF2DA0D}" type="datetimeFigureOut">
-              <a:rPr lang="zh-TW" altLang="en-US" smtClean="0"/>
-              <a:pPr/>
-              <a:t>2023/3/18</a:t>
+            <a:fld id="{44A4FD66-1568-420A-9FCA-2F30AA624E21}" type="datetimeFigureOut">
+              <a:rPr lang="en-US" smtClean="0"/>
+              <a:t>8/3/2024</a:t>
             </a:fld>
-            <a:endParaRPr lang="zh-TW" altLang="en-US"/>
+            <a:endParaRPr lang="en-US"/>
           </a:p>
         </p:txBody>
       </p:sp>
@@ -2523,7 +2536,7 @@
           <a:bodyPr/>
           <a:lstStyle/>
           <a:p>
-            <a:endParaRPr lang="zh-TW" altLang="en-US"/>
+            <a:endParaRPr lang="en-US"/>
           </a:p>
         </p:txBody>
       </p:sp>
@@ -2542,16 +2555,20 @@
           <a:bodyPr/>
           <a:lstStyle/>
           <a:p>
-            <a:fld id="{A64ACC33-9C22-4658-8492-F5AEE7B691C7}" type="slidenum">
-              <a:rPr lang="zh-TW" altLang="en-US" smtClean="0"/>
-              <a:pPr/>
+            <a:fld id="{6C3C596C-8257-452A-9BCB-088AA8071E41}" type="slidenum">
+              <a:rPr lang="en-US" smtClean="0"/>
               <a:t>‹#›</a:t>
             </a:fld>
-            <a:endParaRPr lang="zh-TW" altLang="en-US"/>
+            <a:endParaRPr lang="en-US"/>
           </a:p>
         </p:txBody>
       </p:sp>
     </p:spTree>
+    <p:extLst>
+      <p:ext uri="{BB962C8B-B14F-4D97-AF65-F5344CB8AC3E}">
+        <p14:creationId xmlns:p14="http://schemas.microsoft.com/office/powerpoint/2010/main" val="728221878"/>
+      </p:ext>
+    </p:extLst>
   </p:cSld>
   <p:clrMapOvr>
     <a:masterClrMapping/>
@@ -2598,7 +2615,7 @@
         </p:nvSpPr>
         <p:spPr>
           <a:xfrm>
-            <a:off x="609600" y="274638"/>
+            <a:off x="609600" y="274637"/>
             <a:ext cx="10972800" cy="1143000"/>
           </a:xfrm>
           <a:prstGeom prst="rect">
@@ -2612,10 +2629,9 @@
           <a:lstStyle/>
           <a:p>
             <a:r>
-              <a:rPr lang="zh-TW" altLang="en-US" smtClean="0"/>
+              <a:rPr lang="zh-TW" altLang="en-US"/>
               <a:t>按一下以編輯母片標題樣式</a:t>
             </a:r>
-            <a:endParaRPr lang="zh-TW" altLang="en-US"/>
           </a:p>
         </p:txBody>
       </p:sp>
@@ -2646,38 +2662,37 @@
           <a:p>
             <a:pPr lvl="0"/>
             <a:r>
-              <a:rPr lang="zh-TW" altLang="en-US" smtClean="0"/>
+              <a:rPr lang="zh-TW" altLang="en-US"/>
               <a:t>按一下以編輯母片文字樣式</a:t>
             </a:r>
           </a:p>
           <a:p>
             <a:pPr lvl="1"/>
             <a:r>
-              <a:rPr lang="zh-TW" altLang="en-US" smtClean="0"/>
+              <a:rPr lang="zh-TW" altLang="en-US"/>
               <a:t>第二層</a:t>
             </a:r>
           </a:p>
           <a:p>
             <a:pPr lvl="2"/>
             <a:r>
-              <a:rPr lang="zh-TW" altLang="en-US" smtClean="0"/>
+              <a:rPr lang="zh-TW" altLang="en-US"/>
               <a:t>第三層</a:t>
             </a:r>
           </a:p>
           <a:p>
             <a:pPr lvl="3"/>
             <a:r>
-              <a:rPr lang="zh-TW" altLang="en-US" smtClean="0"/>
+              <a:rPr lang="zh-TW" altLang="en-US"/>
               <a:t>第四層</a:t>
             </a:r>
           </a:p>
           <a:p>
             <a:pPr lvl="4"/>
             <a:r>
-              <a:rPr lang="zh-TW" altLang="en-US" smtClean="0"/>
+              <a:rPr lang="zh-TW" altLang="en-US"/>
               <a:t>第五層</a:t>
             </a:r>
-            <a:endParaRPr lang="zh-TW" altLang="en-US"/>
           </a:p>
         </p:txBody>
       </p:sp>
@@ -2693,7 +2708,7 @@
         </p:nvSpPr>
         <p:spPr>
           <a:xfrm>
-            <a:off x="609600" y="6356351"/>
+            <a:off x="609600" y="6356352"/>
             <a:ext cx="2844800" cy="365125"/>
           </a:xfrm>
           <a:prstGeom prst="rect">
@@ -2704,7 +2719,7 @@
           <a:bodyPr vert="horz" lIns="91440" tIns="45720" rIns="91440" bIns="45720" rtlCol="0" anchor="ctr"/>
           <a:lstStyle>
             <a:lvl1pPr algn="l">
-              <a:defRPr sz="1200">
+              <a:defRPr sz="1600">
                 <a:solidFill>
                   <a:schemeClr val="tx1">
                     <a:tint val="75000"/>
@@ -2714,12 +2729,11 @@
             </a:lvl1pPr>
           </a:lstStyle>
           <a:p>
-            <a:fld id="{A1917291-EF68-49D2-BD31-EB27FFF2DA0D}" type="datetimeFigureOut">
-              <a:rPr lang="zh-TW" altLang="en-US" smtClean="0"/>
-              <a:pPr/>
-              <a:t>2023/3/18</a:t>
+            <a:fld id="{44A4FD66-1568-420A-9FCA-2F30AA624E21}" type="datetimeFigureOut">
+              <a:rPr lang="en-US" smtClean="0"/>
+              <a:t>8/3/2024</a:t>
             </a:fld>
-            <a:endParaRPr lang="zh-TW" altLang="en-US"/>
+            <a:endParaRPr lang="en-US"/>
           </a:p>
         </p:txBody>
       </p:sp>
@@ -2735,7 +2749,7 @@
         </p:nvSpPr>
         <p:spPr>
           <a:xfrm>
-            <a:off x="4165600" y="6356351"/>
+            <a:off x="4165600" y="6356352"/>
             <a:ext cx="3860800" cy="365125"/>
           </a:xfrm>
           <a:prstGeom prst="rect">
@@ -2746,7 +2760,7 @@
           <a:bodyPr vert="horz" lIns="91440" tIns="45720" rIns="91440" bIns="45720" rtlCol="0" anchor="ctr"/>
           <a:lstStyle>
             <a:lvl1pPr algn="ctr">
-              <a:defRPr sz="1200">
+              <a:defRPr sz="1600">
                 <a:solidFill>
                   <a:schemeClr val="tx1">
                     <a:tint val="75000"/>
@@ -2756,7 +2770,7 @@
             </a:lvl1pPr>
           </a:lstStyle>
           <a:p>
-            <a:endParaRPr lang="zh-TW" altLang="en-US"/>
+            <a:endParaRPr lang="en-US"/>
           </a:p>
         </p:txBody>
       </p:sp>
@@ -2772,7 +2786,7 @@
         </p:nvSpPr>
         <p:spPr>
           <a:xfrm>
-            <a:off x="8737600" y="6356351"/>
+            <a:off x="8737600" y="6356352"/>
             <a:ext cx="2844800" cy="365125"/>
           </a:xfrm>
           <a:prstGeom prst="rect">
@@ -2783,7 +2797,7 @@
           <a:bodyPr vert="horz" lIns="91440" tIns="45720" rIns="91440" bIns="45720" rtlCol="0" anchor="ctr"/>
           <a:lstStyle>
             <a:lvl1pPr algn="r">
-              <a:defRPr sz="1200">
+              <a:defRPr sz="1600">
                 <a:solidFill>
                   <a:schemeClr val="tx1">
                     <a:tint val="75000"/>
@@ -2793,16 +2807,20 @@
             </a:lvl1pPr>
           </a:lstStyle>
           <a:p>
-            <a:fld id="{A64ACC33-9C22-4658-8492-F5AEE7B691C7}" type="slidenum">
-              <a:rPr lang="zh-TW" altLang="en-US" smtClean="0"/>
-              <a:pPr/>
+            <a:fld id="{6C3C596C-8257-452A-9BCB-088AA8071E41}" type="slidenum">
+              <a:rPr lang="en-US" smtClean="0"/>
               <a:t>‹#›</a:t>
             </a:fld>
-            <a:endParaRPr lang="zh-TW" altLang="en-US"/>
+            <a:endParaRPr lang="en-US"/>
           </a:p>
         </p:txBody>
       </p:sp>
     </p:spTree>
+    <p:extLst>
+      <p:ext uri="{BB962C8B-B14F-4D97-AF65-F5344CB8AC3E}">
+        <p14:creationId xmlns:p14="http://schemas.microsoft.com/office/powerpoint/2010/main" val="3100216861"/>
+      </p:ext>
+    </p:extLst>
   </p:cSld>
   <p:clrMap bg1="lt1" tx1="dk1" bg2="lt2" tx2="dk2" accent1="accent1" accent2="accent2" accent3="accent3" accent4="accent4" accent5="accent5" accent6="accent6" hlink="hlink" folHlink="folHlink"/>
   <p:sldLayoutIdLst>
@@ -2820,12 +2838,12 @@
   </p:sldLayoutIdLst>
   <p:txStyles>
     <p:titleStyle>
-      <a:lvl1pPr algn="ctr" defTabSz="914400" rtl="0" eaLnBrk="1" latinLnBrk="0" hangingPunct="1">
+      <a:lvl1pPr algn="ctr" defTabSz="1219170" rtl="0" eaLnBrk="1" latinLnBrk="0" hangingPunct="1">
         <a:spcBef>
           <a:spcPct val="0"/>
         </a:spcBef>
         <a:buNone/>
-        <a:defRPr sz="4400" kern="1200">
+        <a:defRPr sz="5867" kern="1200">
           <a:solidFill>
             <a:schemeClr val="tx1"/>
           </a:solidFill>
@@ -2836,11 +2854,41 @@
       </a:lvl1pPr>
     </p:titleStyle>
     <p:bodyStyle>
-      <a:lvl1pPr marL="342900" indent="-342900" algn="l" defTabSz="914400" rtl="0" eaLnBrk="1" latinLnBrk="0" hangingPunct="1">
+      <a:lvl1pPr marL="457189" indent="-457189" algn="l" defTabSz="1219170" rtl="0" eaLnBrk="1" latinLnBrk="0" hangingPunct="1">
         <a:spcBef>
           <a:spcPct val="20000"/>
         </a:spcBef>
-        <a:buFont typeface="Arial" pitchFamily="34" charset="0"/>
+        <a:buFont typeface="Arial" panose="02080604020202020204" pitchFamily="34" charset="0"/>
+        <a:buChar char="•"/>
+        <a:defRPr sz="4267" kern="1200">
+          <a:solidFill>
+            <a:schemeClr val="tx1"/>
+          </a:solidFill>
+          <a:latin typeface="+mn-lt"/>
+          <a:ea typeface="+mn-ea"/>
+          <a:cs typeface="+mn-cs"/>
+        </a:defRPr>
+      </a:lvl1pPr>
+      <a:lvl2pPr marL="990575" indent="-380990" algn="l" defTabSz="1219170" rtl="0" eaLnBrk="1" latinLnBrk="0" hangingPunct="1">
+        <a:spcBef>
+          <a:spcPct val="20000"/>
+        </a:spcBef>
+        <a:buFont typeface="Arial" panose="02080604020202020204" pitchFamily="34" charset="0"/>
+        <a:buChar char="–"/>
+        <a:defRPr sz="3733" kern="1200">
+          <a:solidFill>
+            <a:schemeClr val="tx1"/>
+          </a:solidFill>
+          <a:latin typeface="+mn-lt"/>
+          <a:ea typeface="+mn-ea"/>
+          <a:cs typeface="+mn-cs"/>
+        </a:defRPr>
+      </a:lvl2pPr>
+      <a:lvl3pPr marL="1523962" indent="-304792" algn="l" defTabSz="1219170" rtl="0" eaLnBrk="1" latinLnBrk="0" hangingPunct="1">
+        <a:spcBef>
+          <a:spcPct val="20000"/>
+        </a:spcBef>
+        <a:buFont typeface="Arial" panose="02080604020202020204" pitchFamily="34" charset="0"/>
         <a:buChar char="•"/>
         <a:defRPr sz="3200" kern="1200">
           <a:solidFill>
@@ -2850,44 +2898,14 @@
           <a:ea typeface="+mn-ea"/>
           <a:cs typeface="+mn-cs"/>
         </a:defRPr>
-      </a:lvl1pPr>
-      <a:lvl2pPr marL="742950" indent="-285750" algn="l" defTabSz="914400" rtl="0" eaLnBrk="1" latinLnBrk="0" hangingPunct="1">
+      </a:lvl3pPr>
+      <a:lvl4pPr marL="2133547" indent="-304792" algn="l" defTabSz="1219170" rtl="0" eaLnBrk="1" latinLnBrk="0" hangingPunct="1">
         <a:spcBef>
           <a:spcPct val="20000"/>
         </a:spcBef>
-        <a:buFont typeface="Arial" pitchFamily="34" charset="0"/>
+        <a:buFont typeface="Arial" panose="02080604020202020204" pitchFamily="34" charset="0"/>
         <a:buChar char="–"/>
-        <a:defRPr sz="2800" kern="1200">
-          <a:solidFill>
-            <a:schemeClr val="tx1"/>
-          </a:solidFill>
-          <a:latin typeface="+mn-lt"/>
-          <a:ea typeface="+mn-ea"/>
-          <a:cs typeface="+mn-cs"/>
-        </a:defRPr>
-      </a:lvl2pPr>
-      <a:lvl3pPr marL="1143000" indent="-228600" algn="l" defTabSz="914400" rtl="0" eaLnBrk="1" latinLnBrk="0" hangingPunct="1">
-        <a:spcBef>
-          <a:spcPct val="20000"/>
-        </a:spcBef>
-        <a:buFont typeface="Arial" pitchFamily="34" charset="0"/>
-        <a:buChar char="•"/>
-        <a:defRPr sz="2400" kern="1200">
-          <a:solidFill>
-            <a:schemeClr val="tx1"/>
-          </a:solidFill>
-          <a:latin typeface="+mn-lt"/>
-          <a:ea typeface="+mn-ea"/>
-          <a:cs typeface="+mn-cs"/>
-        </a:defRPr>
-      </a:lvl3pPr>
-      <a:lvl4pPr marL="1600200" indent="-228600" algn="l" defTabSz="914400" rtl="0" eaLnBrk="1" latinLnBrk="0" hangingPunct="1">
-        <a:spcBef>
-          <a:spcPct val="20000"/>
-        </a:spcBef>
-        <a:buFont typeface="Arial" pitchFamily="34" charset="0"/>
-        <a:buChar char="–"/>
-        <a:defRPr sz="2000" kern="1200">
+        <a:defRPr sz="2667" kern="1200">
           <a:solidFill>
             <a:schemeClr val="tx1"/>
           </a:solidFill>
@@ -2896,13 +2914,13 @@
           <a:cs typeface="+mn-cs"/>
         </a:defRPr>
       </a:lvl4pPr>
-      <a:lvl5pPr marL="2057400" indent="-228600" algn="l" defTabSz="914400" rtl="0" eaLnBrk="1" latinLnBrk="0" hangingPunct="1">
+      <a:lvl5pPr marL="2743131" indent="-304792" algn="l" defTabSz="1219170" rtl="0" eaLnBrk="1" latinLnBrk="0" hangingPunct="1">
         <a:spcBef>
           <a:spcPct val="20000"/>
         </a:spcBef>
-        <a:buFont typeface="Arial" pitchFamily="34" charset="0"/>
+        <a:buFont typeface="Arial" panose="02080604020202020204" pitchFamily="34" charset="0"/>
         <a:buChar char="»"/>
-        <a:defRPr sz="2000" kern="1200">
+        <a:defRPr sz="2667" kern="1200">
           <a:solidFill>
             <a:schemeClr val="tx1"/>
           </a:solidFill>
@@ -2911,13 +2929,13 @@
           <a:cs typeface="+mn-cs"/>
         </a:defRPr>
       </a:lvl5pPr>
-      <a:lvl6pPr marL="2514600" indent="-228600" algn="l" defTabSz="914400" rtl="0" eaLnBrk="1" latinLnBrk="0" hangingPunct="1">
+      <a:lvl6pPr marL="3352716" indent="-304792" algn="l" defTabSz="1219170" rtl="0" eaLnBrk="1" latinLnBrk="0" hangingPunct="1">
         <a:spcBef>
           <a:spcPct val="20000"/>
         </a:spcBef>
-        <a:buFont typeface="Arial" pitchFamily="34" charset="0"/>
+        <a:buFont typeface="Arial" panose="02080604020202020204" pitchFamily="34" charset="0"/>
         <a:buChar char="•"/>
-        <a:defRPr sz="2000" kern="1200">
+        <a:defRPr sz="2667" kern="1200">
           <a:solidFill>
             <a:schemeClr val="tx1"/>
           </a:solidFill>
@@ -2926,13 +2944,13 @@
           <a:cs typeface="+mn-cs"/>
         </a:defRPr>
       </a:lvl6pPr>
-      <a:lvl7pPr marL="2971800" indent="-228600" algn="l" defTabSz="914400" rtl="0" eaLnBrk="1" latinLnBrk="0" hangingPunct="1">
+      <a:lvl7pPr marL="3962301" indent="-304792" algn="l" defTabSz="1219170" rtl="0" eaLnBrk="1" latinLnBrk="0" hangingPunct="1">
         <a:spcBef>
           <a:spcPct val="20000"/>
         </a:spcBef>
-        <a:buFont typeface="Arial" pitchFamily="34" charset="0"/>
+        <a:buFont typeface="Arial" panose="02080604020202020204" pitchFamily="34" charset="0"/>
         <a:buChar char="•"/>
-        <a:defRPr sz="2000" kern="1200">
+        <a:defRPr sz="2667" kern="1200">
           <a:solidFill>
             <a:schemeClr val="tx1"/>
           </a:solidFill>
@@ -2941,13 +2959,13 @@
           <a:cs typeface="+mn-cs"/>
         </a:defRPr>
       </a:lvl7pPr>
-      <a:lvl8pPr marL="3429000" indent="-228600" algn="l" defTabSz="914400" rtl="0" eaLnBrk="1" latinLnBrk="0" hangingPunct="1">
+      <a:lvl8pPr marL="4571886" indent="-304792" algn="l" defTabSz="1219170" rtl="0" eaLnBrk="1" latinLnBrk="0" hangingPunct="1">
         <a:spcBef>
           <a:spcPct val="20000"/>
         </a:spcBef>
-        <a:buFont typeface="Arial" pitchFamily="34" charset="0"/>
+        <a:buFont typeface="Arial" panose="02080604020202020204" pitchFamily="34" charset="0"/>
         <a:buChar char="•"/>
-        <a:defRPr sz="2000" kern="1200">
+        <a:defRPr sz="2667" kern="1200">
           <a:solidFill>
             <a:schemeClr val="tx1"/>
           </a:solidFill>
@@ -2956,13 +2974,13 @@
           <a:cs typeface="+mn-cs"/>
         </a:defRPr>
       </a:lvl8pPr>
-      <a:lvl9pPr marL="3886200" indent="-228600" algn="l" defTabSz="914400" rtl="0" eaLnBrk="1" latinLnBrk="0" hangingPunct="1">
+      <a:lvl9pPr marL="5181470" indent="-304792" algn="l" defTabSz="1219170" rtl="0" eaLnBrk="1" latinLnBrk="0" hangingPunct="1">
         <a:spcBef>
           <a:spcPct val="20000"/>
         </a:spcBef>
-        <a:buFont typeface="Arial" pitchFamily="34" charset="0"/>
+        <a:buFont typeface="Arial" panose="02080604020202020204" pitchFamily="34" charset="0"/>
         <a:buChar char="•"/>
-        <a:defRPr sz="2000" kern="1200">
+        <a:defRPr sz="2667" kern="1200">
           <a:solidFill>
             <a:schemeClr val="tx1"/>
           </a:solidFill>
@@ -2976,8 +2994,8 @@
       <a:defPPr>
         <a:defRPr lang="zh-TW"/>
       </a:defPPr>
-      <a:lvl1pPr marL="0" algn="l" defTabSz="914400" rtl="0" eaLnBrk="1" latinLnBrk="0" hangingPunct="1">
-        <a:defRPr sz="1800" kern="1200">
+      <a:lvl1pPr marL="0" algn="l" defTabSz="1219170" rtl="0" eaLnBrk="1" latinLnBrk="0" hangingPunct="1">
+        <a:defRPr sz="2400" kern="1200">
           <a:solidFill>
             <a:schemeClr val="tx1"/>
           </a:solidFill>
@@ -2986,8 +3004,8 @@
           <a:cs typeface="+mn-cs"/>
         </a:defRPr>
       </a:lvl1pPr>
-      <a:lvl2pPr marL="457200" algn="l" defTabSz="914400" rtl="0" eaLnBrk="1" latinLnBrk="0" hangingPunct="1">
-        <a:defRPr sz="1800" kern="1200">
+      <a:lvl2pPr marL="609585" algn="l" defTabSz="1219170" rtl="0" eaLnBrk="1" latinLnBrk="0" hangingPunct="1">
+        <a:defRPr sz="2400" kern="1200">
           <a:solidFill>
             <a:schemeClr val="tx1"/>
           </a:solidFill>
@@ -2996,8 +3014,8 @@
           <a:cs typeface="+mn-cs"/>
         </a:defRPr>
       </a:lvl2pPr>
-      <a:lvl3pPr marL="914400" algn="l" defTabSz="914400" rtl="0" eaLnBrk="1" latinLnBrk="0" hangingPunct="1">
-        <a:defRPr sz="1800" kern="1200">
+      <a:lvl3pPr marL="1219170" algn="l" defTabSz="1219170" rtl="0" eaLnBrk="1" latinLnBrk="0" hangingPunct="1">
+        <a:defRPr sz="2400" kern="1200">
           <a:solidFill>
             <a:schemeClr val="tx1"/>
           </a:solidFill>
@@ -3006,8 +3024,8 @@
           <a:cs typeface="+mn-cs"/>
         </a:defRPr>
       </a:lvl3pPr>
-      <a:lvl4pPr marL="1371600" algn="l" defTabSz="914400" rtl="0" eaLnBrk="1" latinLnBrk="0" hangingPunct="1">
-        <a:defRPr sz="1800" kern="1200">
+      <a:lvl4pPr marL="1828754" algn="l" defTabSz="1219170" rtl="0" eaLnBrk="1" latinLnBrk="0" hangingPunct="1">
+        <a:defRPr sz="2400" kern="1200">
           <a:solidFill>
             <a:schemeClr val="tx1"/>
           </a:solidFill>
@@ -3016,8 +3034,8 @@
           <a:cs typeface="+mn-cs"/>
         </a:defRPr>
       </a:lvl4pPr>
-      <a:lvl5pPr marL="1828800" algn="l" defTabSz="914400" rtl="0" eaLnBrk="1" latinLnBrk="0" hangingPunct="1">
-        <a:defRPr sz="1800" kern="1200">
+      <a:lvl5pPr marL="2438339" algn="l" defTabSz="1219170" rtl="0" eaLnBrk="1" latinLnBrk="0" hangingPunct="1">
+        <a:defRPr sz="2400" kern="1200">
           <a:solidFill>
             <a:schemeClr val="tx1"/>
           </a:solidFill>
@@ -3026,8 +3044,8 @@
           <a:cs typeface="+mn-cs"/>
         </a:defRPr>
       </a:lvl5pPr>
-      <a:lvl6pPr marL="2286000" algn="l" defTabSz="914400" rtl="0" eaLnBrk="1" latinLnBrk="0" hangingPunct="1">
-        <a:defRPr sz="1800" kern="1200">
+      <a:lvl6pPr marL="3047924" algn="l" defTabSz="1219170" rtl="0" eaLnBrk="1" latinLnBrk="0" hangingPunct="1">
+        <a:defRPr sz="2400" kern="1200">
           <a:solidFill>
             <a:schemeClr val="tx1"/>
           </a:solidFill>
@@ -3036,8 +3054,8 @@
           <a:cs typeface="+mn-cs"/>
         </a:defRPr>
       </a:lvl6pPr>
-      <a:lvl7pPr marL="2743200" algn="l" defTabSz="914400" rtl="0" eaLnBrk="1" latinLnBrk="0" hangingPunct="1">
-        <a:defRPr sz="1800" kern="1200">
+      <a:lvl7pPr marL="3657509" algn="l" defTabSz="1219170" rtl="0" eaLnBrk="1" latinLnBrk="0" hangingPunct="1">
+        <a:defRPr sz="2400" kern="1200">
           <a:solidFill>
             <a:schemeClr val="tx1"/>
           </a:solidFill>
@@ -3046,8 +3064,8 @@
           <a:cs typeface="+mn-cs"/>
         </a:defRPr>
       </a:lvl7pPr>
-      <a:lvl8pPr marL="3200400" algn="l" defTabSz="914400" rtl="0" eaLnBrk="1" latinLnBrk="0" hangingPunct="1">
-        <a:defRPr sz="1800" kern="1200">
+      <a:lvl8pPr marL="4267093" algn="l" defTabSz="1219170" rtl="0" eaLnBrk="1" latinLnBrk="0" hangingPunct="1">
+        <a:defRPr sz="2400" kern="1200">
           <a:solidFill>
             <a:schemeClr val="tx1"/>
           </a:solidFill>
@@ -3056,8 +3074,8 @@
           <a:cs typeface="+mn-cs"/>
         </a:defRPr>
       </a:lvl8pPr>
-      <a:lvl9pPr marL="3657600" algn="l" defTabSz="914400" rtl="0" eaLnBrk="1" latinLnBrk="0" hangingPunct="1">
-        <a:defRPr sz="1800" kern="1200">
+      <a:lvl9pPr marL="4876678" algn="l" defTabSz="1219170" rtl="0" eaLnBrk="1" latinLnBrk="0" hangingPunct="1">
+        <a:defRPr sz="2400" kern="1200">
           <a:solidFill>
             <a:schemeClr val="tx1"/>
           </a:solidFill>
@@ -3111,9 +3129,9 @@
           <a:lstStyle/>
           <a:p>
             <a:r>
-              <a:rPr lang="zh-TW" altLang="en-US" sz="7200" b="1" i="1" dirty="0">
-                <a:solidFill>
-                  <a:srgbClr val="660033"/>
+              <a:rPr lang="zh-CN" altLang="en-US" sz="7200" b="1" i="1" dirty="0">
+                <a:solidFill>
+                  <a:srgbClr val="000066"/>
                 </a:solidFill>
                 <a:effectLst>
                   <a:outerShdw blurRad="38100" dist="38100" dir="2700000" algn="tl">
@@ -3125,34 +3143,26 @@
                 <a:latin typeface="微軟正黑體" pitchFamily="34" charset="-120"/>
                 <a:ea typeface="微軟正黑體" pitchFamily="34" charset="-120"/>
               </a:rPr>
-              <a:t>我</a:t>
-            </a:r>
-            <a:r>
-              <a:rPr lang="zh-TW" altLang="en-US" sz="7200" b="1" i="1" dirty="0">
-                <a:solidFill>
-                  <a:srgbClr val="660033"/>
-                </a:solidFill>
-                <a:effectLst>
-                  <a:outerShdw blurRad="38100" dist="38100" dir="2700000" algn="tl">
-                    <a:srgbClr val="000000">
-                      <a:alpha val="43137"/>
-                    </a:srgbClr>
-                  </a:outerShdw>
-                </a:effectLst>
-                <a:latin typeface="微軟正黑體" pitchFamily="34" charset="-120"/>
-                <a:ea typeface="微軟正黑體" pitchFamily="34" charset="-120"/>
-              </a:rPr>
-              <a:t>全心頌讚</a:t>
-            </a:r>
+              <a:t>我全心頌讚</a:t>
+            </a:r>
+            <a:endParaRPr lang="zh-TW" altLang="en-US" sz="7200" b="1" i="1" dirty="0">
+              <a:solidFill>
+                <a:srgbClr val="000066"/>
+              </a:solidFill>
+              <a:effectLst>
+                <a:outerShdw blurRad="38100" dist="38100" dir="2700000" algn="tl">
+                  <a:srgbClr val="000000">
+                    <a:alpha val="43137"/>
+                  </a:srgbClr>
+                </a:outerShdw>
+              </a:effectLst>
+              <a:latin typeface="微軟正黑體" pitchFamily="34" charset="-120"/>
+              <a:ea typeface="微軟正黑體" pitchFamily="34" charset="-120"/>
+            </a:endParaRPr>
           </a:p>
         </p:txBody>
       </p:sp>
     </p:spTree>
-    <p:extLst>
-      <p:ext uri="{BB962C8B-B14F-4D97-AF65-F5344CB8AC3E}">
-        <p14:creationId xmlns:p14="http://schemas.microsoft.com/office/powerpoint/2010/main" val="8163010"/>
-      </p:ext>
-    </p:extLst>
   </p:cSld>
   <p:clrMapOvr>
     <a:masterClrMapping/>
@@ -3205,36 +3215,16 @@
             <a:r>
               <a:rPr lang="zh-TW" altLang="en-US" sz="6400" b="1" dirty="0">
                 <a:solidFill>
-                  <a:srgbClr val="660033"/>
+                  <a:srgbClr val="000066"/>
                 </a:solidFill>
                 <a:latin typeface="微軟正黑體" pitchFamily="34" charset="-120"/>
                 <a:ea typeface="微軟正黑體" pitchFamily="34" charset="-120"/>
               </a:rPr>
-              <a:t>當</a:t>
-            </a:r>
-            <a:r>
-              <a:rPr lang="zh-TW" altLang="en-US" sz="6400" b="1" dirty="0">
-                <a:solidFill>
-                  <a:srgbClr val="660033"/>
-                </a:solidFill>
-                <a:latin typeface="微軟正黑體" pitchFamily="34" charset="-120"/>
-                <a:ea typeface="微軟正黑體" pitchFamily="34" charset="-120"/>
-              </a:rPr>
-              <a:t>我抬頭</a:t>
-            </a:r>
-            <a:r>
-              <a:rPr lang="zh-TW" altLang="en-US" sz="6400" b="1" dirty="0">
-                <a:solidFill>
-                  <a:srgbClr val="660033"/>
-                </a:solidFill>
-                <a:latin typeface="微軟正黑體" pitchFamily="34" charset="-120"/>
-                <a:ea typeface="微軟正黑體" pitchFamily="34" charset="-120"/>
-              </a:rPr>
-              <a:t>見祢</a:t>
+              <a:t>當我抬頭見祢</a:t>
             </a:r>
             <a:endParaRPr lang="en-US" altLang="zh-TW" sz="6400" b="1" dirty="0">
               <a:solidFill>
-                <a:srgbClr val="660033"/>
+                <a:srgbClr val="000066"/>
               </a:solidFill>
               <a:latin typeface="微軟正黑體" pitchFamily="34" charset="-120"/>
               <a:ea typeface="微軟正黑體" pitchFamily="34" charset="-120"/>
@@ -3247,36 +3237,16 @@
             <a:r>
               <a:rPr lang="zh-TW" altLang="en-US" sz="6400" b="1" dirty="0">
                 <a:solidFill>
-                  <a:srgbClr val="660033"/>
+                  <a:srgbClr val="000066"/>
                 </a:solidFill>
                 <a:latin typeface="微軟正黑體" pitchFamily="34" charset="-120"/>
                 <a:ea typeface="微軟正黑體" pitchFamily="34" charset="-120"/>
               </a:rPr>
-              <a:t>當我側耳聆</a:t>
-            </a:r>
-            <a:r>
-              <a:rPr lang="zh-TW" altLang="en-US" sz="6400" b="1" dirty="0">
-                <a:solidFill>
-                  <a:srgbClr val="660033"/>
-                </a:solidFill>
-                <a:latin typeface="微軟正黑體" pitchFamily="34" charset="-120"/>
-                <a:ea typeface="微軟正黑體" pitchFamily="34" charset="-120"/>
-              </a:rPr>
-              <a:t>聽祢聲</a:t>
-            </a:r>
-            <a:r>
-              <a:rPr lang="zh-TW" altLang="en-US" sz="6400" b="1" dirty="0">
-                <a:solidFill>
-                  <a:srgbClr val="660033"/>
-                </a:solidFill>
-                <a:latin typeface="微軟正黑體" pitchFamily="34" charset="-120"/>
-                <a:ea typeface="微軟正黑體" pitchFamily="34" charset="-120"/>
-              </a:rPr>
-              <a:t>音</a:t>
+              <a:t>當我側耳聆聽祢聲音 </a:t>
             </a:r>
             <a:endParaRPr lang="en-US" altLang="zh-TW" sz="6400" b="1" dirty="0">
               <a:solidFill>
-                <a:srgbClr val="660033"/>
+                <a:srgbClr val="000066"/>
               </a:solidFill>
               <a:latin typeface="微軟正黑體" pitchFamily="34" charset="-120"/>
               <a:ea typeface="微軟正黑體" pitchFamily="34" charset="-120"/>
@@ -3292,8 +3262,8 @@
         </p:nvSpPr>
         <p:spPr>
           <a:xfrm>
-            <a:off x="0" y="5157192"/>
-            <a:ext cx="12192000" cy="666786"/>
+            <a:off x="0" y="5157193"/>
+            <a:ext cx="12192000" cy="584775"/>
           </a:xfrm>
           <a:prstGeom prst="rect">
             <a:avLst/>
@@ -3308,9 +3278,9 @@
           <a:p>
             <a:pPr algn="ctr"/>
             <a:r>
-              <a:rPr lang="en-US" sz="3733" b="1" dirty="0">
-                <a:solidFill>
-                  <a:srgbClr val="660033"/>
+              <a:rPr lang="en-US" sz="3200" b="1" dirty="0">
+                <a:solidFill>
+                  <a:srgbClr val="000066"/>
                 </a:solidFill>
                 <a:latin typeface="Microsoft JhengHei" panose="020B0604030504040204" pitchFamily="34" charset="-120"/>
                 <a:ea typeface="Microsoft JhengHei" panose="020B0604030504040204" pitchFamily="34" charset="-120"/>
@@ -3318,28 +3288,28 @@
               <a:t>( </a:t>
             </a:r>
             <a:r>
-              <a:rPr lang="zh-CN" altLang="en-US" sz="3733" b="1" dirty="0">
-                <a:solidFill>
-                  <a:srgbClr val="660033"/>
+              <a:rPr lang="zh-CN" altLang="en-US" sz="3200" b="1" dirty="0">
+                <a:solidFill>
+                  <a:srgbClr val="000066"/>
                 </a:solidFill>
                 <a:latin typeface="Microsoft JhengHei" panose="020B0604030504040204" pitchFamily="34" charset="-120"/>
                 <a:ea typeface="Microsoft JhengHei" panose="020B0604030504040204" pitchFamily="34" charset="-120"/>
               </a:rPr>
-              <a:t>正</a:t>
-            </a:r>
-            <a:r>
-              <a:rPr lang="en-US" sz="3733" b="1" dirty="0">
-                <a:solidFill>
-                  <a:srgbClr val="660033"/>
+              <a:t>正歌</a:t>
+            </a:r>
+            <a:r>
+              <a:rPr lang="en-US" sz="3200" b="1" dirty="0">
+                <a:solidFill>
+                  <a:srgbClr val="000066"/>
                 </a:solidFill>
                 <a:latin typeface="Microsoft JhengHei" panose="020B0604030504040204" pitchFamily="34" charset="-120"/>
                 <a:ea typeface="Microsoft JhengHei" panose="020B0604030504040204" pitchFamily="34" charset="-120"/>
               </a:rPr>
               <a:t> )</a:t>
             </a:r>
-            <a:endParaRPr lang="vi-VN" sz="3733" b="1" dirty="0">
+            <a:endParaRPr lang="vi-VN" sz="3200" b="1" dirty="0">
               <a:solidFill>
-                <a:srgbClr val="660033"/>
+                <a:srgbClr val="000066"/>
               </a:solidFill>
               <a:ea typeface="Microsoft JhengHei" panose="020B0604030504040204" pitchFamily="34" charset="-120"/>
             </a:endParaRPr>
@@ -3347,11 +3317,6 @@
         </p:txBody>
       </p:sp>
     </p:spTree>
-    <p:extLst>
-      <p:ext uri="{BB962C8B-B14F-4D97-AF65-F5344CB8AC3E}">
-        <p14:creationId xmlns:p14="http://schemas.microsoft.com/office/powerpoint/2010/main" val="2257633488"/>
-      </p:ext>
-    </p:extLst>
   </p:cSld>
   <p:clrMapOvr>
     <a:masterClrMapping/>
@@ -3404,7 +3369,7 @@
             <a:r>
               <a:rPr lang="zh-TW" altLang="en-US" sz="6400" b="1" dirty="0">
                 <a:solidFill>
-                  <a:srgbClr val="660033"/>
+                  <a:srgbClr val="000066"/>
                 </a:solidFill>
                 <a:latin typeface="微軟正黑體" pitchFamily="34" charset="-120"/>
                 <a:ea typeface="微軟正黑體" pitchFamily="34" charset="-120"/>
@@ -3413,7 +3378,7 @@
             </a:r>
             <a:endParaRPr lang="en-US" altLang="zh-TW" sz="6400" b="1" dirty="0">
               <a:solidFill>
-                <a:srgbClr val="660033"/>
+                <a:srgbClr val="000066"/>
               </a:solidFill>
               <a:latin typeface="微軟正黑體" pitchFamily="34" charset="-120"/>
               <a:ea typeface="微軟正黑體" pitchFamily="34" charset="-120"/>
@@ -3426,33 +3391,20 @@
             <a:r>
               <a:rPr lang="zh-TW" altLang="en-US" sz="6400" b="1" dirty="0">
                 <a:solidFill>
-                  <a:srgbClr val="660033"/>
+                  <a:srgbClr val="000066"/>
                 </a:solidFill>
                 <a:latin typeface="微軟正黑體" pitchFamily="34" charset="-120"/>
                 <a:ea typeface="微軟正黑體" pitchFamily="34" charset="-120"/>
               </a:rPr>
-              <a:t>我傳</a:t>
-            </a:r>
-            <a:r>
-              <a:rPr lang="zh-TW" altLang="en-US" sz="6400" b="1" dirty="0">
-                <a:solidFill>
-                  <a:srgbClr val="660033"/>
-                </a:solidFill>
-                <a:latin typeface="微軟正黑體" pitchFamily="34" charset="-120"/>
-                <a:ea typeface="微軟正黑體" pitchFamily="34" charset="-120"/>
-              </a:rPr>
-              <a:t>揚祢奇</a:t>
-            </a:r>
-            <a:r>
-              <a:rPr lang="zh-TW" altLang="en-US" sz="6400" b="1" dirty="0">
-                <a:solidFill>
-                  <a:srgbClr val="660033"/>
-                </a:solidFill>
-                <a:latin typeface="微軟正黑體" pitchFamily="34" charset="-120"/>
-                <a:ea typeface="微軟正黑體" pitchFamily="34" charset="-120"/>
-              </a:rPr>
-              <a:t>妙作為</a:t>
-            </a:r>
+              <a:t>我傳揚祢奇妙作為 </a:t>
+            </a:r>
+            <a:endParaRPr lang="en-US" altLang="zh-TW" sz="6400" b="1" dirty="0">
+              <a:solidFill>
+                <a:srgbClr val="000066"/>
+              </a:solidFill>
+              <a:latin typeface="微軟正黑體" pitchFamily="34" charset="-120"/>
+              <a:ea typeface="微軟正黑體" pitchFamily="34" charset="-120"/>
+            </a:endParaRPr>
           </a:p>
         </p:txBody>
       </p:sp>
@@ -3464,8 +3416,8 @@
         </p:nvSpPr>
         <p:spPr>
           <a:xfrm>
-            <a:off x="0" y="5157192"/>
-            <a:ext cx="12192000" cy="666786"/>
+            <a:off x="0" y="5157193"/>
+            <a:ext cx="12192000" cy="584775"/>
           </a:xfrm>
           <a:prstGeom prst="rect">
             <a:avLst/>
@@ -3480,9 +3432,9 @@
           <a:p>
             <a:pPr algn="ctr"/>
             <a:r>
-              <a:rPr lang="en-US" sz="3733" b="1" dirty="0">
-                <a:solidFill>
-                  <a:srgbClr val="660033"/>
+              <a:rPr lang="en-US" sz="3200" b="1" dirty="0">
+                <a:solidFill>
+                  <a:srgbClr val="000066"/>
                 </a:solidFill>
                 <a:latin typeface="Microsoft JhengHei" panose="020B0604030504040204" pitchFamily="34" charset="-120"/>
                 <a:ea typeface="Microsoft JhengHei" panose="020B0604030504040204" pitchFamily="34" charset="-120"/>
@@ -3490,28 +3442,28 @@
               <a:t>( </a:t>
             </a:r>
             <a:r>
-              <a:rPr lang="zh-CN" altLang="en-US" sz="3733" b="1" dirty="0">
-                <a:solidFill>
-                  <a:srgbClr val="660033"/>
+              <a:rPr lang="zh-CN" altLang="en-US" sz="3200" b="1" dirty="0">
+                <a:solidFill>
+                  <a:srgbClr val="000066"/>
                 </a:solidFill>
                 <a:latin typeface="Microsoft JhengHei" panose="020B0604030504040204" pitchFamily="34" charset="-120"/>
                 <a:ea typeface="Microsoft JhengHei" panose="020B0604030504040204" pitchFamily="34" charset="-120"/>
               </a:rPr>
-              <a:t>正</a:t>
-            </a:r>
-            <a:r>
-              <a:rPr lang="en-US" sz="3733" b="1" dirty="0">
-                <a:solidFill>
-                  <a:srgbClr val="660033"/>
+              <a:t>正歌</a:t>
+            </a:r>
+            <a:r>
+              <a:rPr lang="en-US" sz="3200" b="1" dirty="0">
+                <a:solidFill>
+                  <a:srgbClr val="000066"/>
                 </a:solidFill>
                 <a:latin typeface="Microsoft JhengHei" panose="020B0604030504040204" pitchFamily="34" charset="-120"/>
                 <a:ea typeface="Microsoft JhengHei" panose="020B0604030504040204" pitchFamily="34" charset="-120"/>
               </a:rPr>
               <a:t> )</a:t>
             </a:r>
-            <a:endParaRPr lang="vi-VN" sz="3733" b="1" dirty="0">
+            <a:endParaRPr lang="vi-VN" sz="3200" b="1" dirty="0">
               <a:solidFill>
-                <a:srgbClr val="660033"/>
+                <a:srgbClr val="000066"/>
               </a:solidFill>
               <a:ea typeface="Microsoft JhengHei" panose="020B0604030504040204" pitchFamily="34" charset="-120"/>
             </a:endParaRPr>
@@ -3521,7 +3473,7 @@
     </p:spTree>
     <p:extLst>
       <p:ext uri="{BB962C8B-B14F-4D97-AF65-F5344CB8AC3E}">
-        <p14:creationId xmlns:p14="http://schemas.microsoft.com/office/powerpoint/2010/main" val="2303741689"/>
+        <p14:creationId xmlns:p14="http://schemas.microsoft.com/office/powerpoint/2010/main" val="2196117186"/>
       </p:ext>
     </p:extLst>
   </p:cSld>
@@ -3576,36 +3528,16 @@
             <a:r>
               <a:rPr lang="zh-TW" altLang="en-US" sz="6400" b="1" dirty="0">
                 <a:solidFill>
-                  <a:srgbClr val="660033"/>
+                  <a:srgbClr val="000066"/>
                 </a:solidFill>
                 <a:latin typeface="微軟正黑體" pitchFamily="34" charset="-120"/>
                 <a:ea typeface="微軟正黑體" pitchFamily="34" charset="-120"/>
               </a:rPr>
-              <a:t>我全心頌</a:t>
-            </a:r>
-            <a:r>
-              <a:rPr lang="zh-TW" altLang="en-US" sz="6400" b="1" dirty="0">
-                <a:solidFill>
-                  <a:srgbClr val="660033"/>
-                </a:solidFill>
-                <a:latin typeface="微軟正黑體" pitchFamily="34" charset="-120"/>
-                <a:ea typeface="微軟正黑體" pitchFamily="34" charset="-120"/>
-              </a:rPr>
-              <a:t>讚祢的</a:t>
-            </a:r>
-            <a:r>
-              <a:rPr lang="zh-TW" altLang="en-US" sz="6400" b="1" dirty="0">
-                <a:solidFill>
-                  <a:srgbClr val="660033"/>
-                </a:solidFill>
-                <a:latin typeface="微軟正黑體" pitchFamily="34" charset="-120"/>
-                <a:ea typeface="微軟正黑體" pitchFamily="34" charset="-120"/>
-              </a:rPr>
-              <a:t>榮美</a:t>
+              <a:t>我全心頌讚  祢的榮美</a:t>
             </a:r>
             <a:endParaRPr lang="en-US" altLang="zh-TW" sz="6400" b="1" dirty="0">
               <a:solidFill>
-                <a:srgbClr val="660033"/>
+                <a:srgbClr val="000066"/>
               </a:solidFill>
               <a:latin typeface="微軟正黑體" pitchFamily="34" charset="-120"/>
               <a:ea typeface="微軟正黑體" pitchFamily="34" charset="-120"/>
@@ -3618,36 +3550,16 @@
             <a:r>
               <a:rPr lang="zh-TW" altLang="en-US" sz="6400" b="1" dirty="0">
                 <a:solidFill>
-                  <a:srgbClr val="660033"/>
+                  <a:srgbClr val="000066"/>
                 </a:solidFill>
                 <a:latin typeface="微軟正黑體" pitchFamily="34" charset="-120"/>
                 <a:ea typeface="微軟正黑體" pitchFamily="34" charset="-120"/>
               </a:rPr>
-              <a:t>我全人頌</a:t>
-            </a:r>
-            <a:r>
-              <a:rPr lang="zh-TW" altLang="en-US" sz="6400" b="1" dirty="0">
-                <a:solidFill>
-                  <a:srgbClr val="660033"/>
-                </a:solidFill>
-                <a:latin typeface="微軟正黑體" pitchFamily="34" charset="-120"/>
-                <a:ea typeface="微軟正黑體" pitchFamily="34" charset="-120"/>
-              </a:rPr>
-              <a:t>讚祢的</a:t>
-            </a:r>
-            <a:r>
-              <a:rPr lang="zh-TW" altLang="en-US" sz="6400" b="1" dirty="0">
-                <a:solidFill>
-                  <a:srgbClr val="660033"/>
-                </a:solidFill>
-                <a:latin typeface="微軟正黑體" pitchFamily="34" charset="-120"/>
-                <a:ea typeface="微軟正黑體" pitchFamily="34" charset="-120"/>
-              </a:rPr>
-              <a:t>作為</a:t>
+              <a:t>我全人頌讚  祢的作為</a:t>
             </a:r>
             <a:endParaRPr lang="en-US" altLang="zh-TW" sz="6400" b="1" dirty="0">
               <a:solidFill>
-                <a:srgbClr val="660033"/>
+                <a:srgbClr val="000066"/>
               </a:solidFill>
               <a:latin typeface="微軟正黑體" pitchFamily="34" charset="-120"/>
               <a:ea typeface="微軟正黑體" pitchFamily="34" charset="-120"/>
@@ -3663,8 +3575,8 @@
         </p:nvSpPr>
         <p:spPr>
           <a:xfrm>
-            <a:off x="0" y="5157192"/>
-            <a:ext cx="12192000" cy="666786"/>
+            <a:off x="0" y="5157193"/>
+            <a:ext cx="12192000" cy="584775"/>
           </a:xfrm>
           <a:prstGeom prst="rect">
             <a:avLst/>
@@ -3679,9 +3591,9 @@
           <a:p>
             <a:pPr algn="ctr"/>
             <a:r>
-              <a:rPr lang="en-US" sz="3733" b="1" dirty="0">
-                <a:solidFill>
-                  <a:srgbClr val="660033"/>
+              <a:rPr lang="en-US" sz="3200" b="1" dirty="0">
+                <a:solidFill>
+                  <a:srgbClr val="000066"/>
                 </a:solidFill>
                 <a:latin typeface="Microsoft JhengHei" panose="020B0604030504040204" pitchFamily="34" charset="-120"/>
                 <a:ea typeface="Microsoft JhengHei" panose="020B0604030504040204" pitchFamily="34" charset="-120"/>
@@ -3689,38 +3601,28 @@
               <a:t>( </a:t>
             </a:r>
             <a:r>
-              <a:rPr lang="zh-CN" altLang="en-US" sz="3733" b="1" dirty="0" smtClean="0">
-                <a:solidFill>
-                  <a:srgbClr val="660033"/>
+              <a:rPr lang="zh-CN" altLang="en-US" sz="3200" b="1" dirty="0">
+                <a:solidFill>
+                  <a:srgbClr val="000066"/>
                 </a:solidFill>
                 <a:latin typeface="Microsoft JhengHei" panose="020B0604030504040204" pitchFamily="34" charset="-120"/>
                 <a:ea typeface="Microsoft JhengHei" panose="020B0604030504040204" pitchFamily="34" charset="-120"/>
               </a:rPr>
-              <a:t>副</a:t>
-            </a:r>
-            <a:r>
-              <a:rPr lang="en-US" sz="3733" b="1" dirty="0" smtClean="0">
-                <a:solidFill>
-                  <a:srgbClr val="660033"/>
+              <a:t>副歌</a:t>
+            </a:r>
+            <a:r>
+              <a:rPr lang="en-US" sz="3200" b="1" dirty="0">
+                <a:solidFill>
+                  <a:srgbClr val="000066"/>
                 </a:solidFill>
                 <a:latin typeface="Microsoft JhengHei" panose="020B0604030504040204" pitchFamily="34" charset="-120"/>
                 <a:ea typeface="Microsoft JhengHei" panose="020B0604030504040204" pitchFamily="34" charset="-120"/>
               </a:rPr>
-              <a:t> </a:t>
-            </a:r>
-            <a:r>
-              <a:rPr lang="en-US" sz="3733" b="1" dirty="0">
-                <a:solidFill>
-                  <a:srgbClr val="660033"/>
-                </a:solidFill>
-                <a:latin typeface="Microsoft JhengHei" panose="020B0604030504040204" pitchFamily="34" charset="-120"/>
-                <a:ea typeface="Microsoft JhengHei" panose="020B0604030504040204" pitchFamily="34" charset="-120"/>
-              </a:rPr>
-              <a:t>)</a:t>
-            </a:r>
-            <a:endParaRPr lang="vi-VN" sz="3733" b="1" dirty="0">
+              <a:t> )</a:t>
+            </a:r>
+            <a:endParaRPr lang="vi-VN" sz="3200" b="1" dirty="0">
               <a:solidFill>
-                <a:srgbClr val="660033"/>
+                <a:srgbClr val="000066"/>
               </a:solidFill>
               <a:ea typeface="Microsoft JhengHei" panose="020B0604030504040204" pitchFamily="34" charset="-120"/>
             </a:endParaRPr>
@@ -3730,7 +3632,7 @@
     </p:spTree>
     <p:extLst>
       <p:ext uri="{BB962C8B-B14F-4D97-AF65-F5344CB8AC3E}">
-        <p14:creationId xmlns:p14="http://schemas.microsoft.com/office/powerpoint/2010/main" val="2609429040"/>
+        <p14:creationId xmlns:p14="http://schemas.microsoft.com/office/powerpoint/2010/main" val="1526440122"/>
       </p:ext>
     </p:extLst>
   </p:cSld>
@@ -3785,16 +3687,16 @@
             <a:r>
               <a:rPr lang="zh-TW" altLang="en-US" sz="6400" b="1" dirty="0">
                 <a:solidFill>
-                  <a:srgbClr val="660033"/>
+                  <a:srgbClr val="000066"/>
                 </a:solidFill>
                 <a:latin typeface="微軟正黑體" pitchFamily="34" charset="-120"/>
                 <a:ea typeface="微軟正黑體" pitchFamily="34" charset="-120"/>
               </a:rPr>
-              <a:t>每日每夜我不停讚美</a:t>
+              <a:t>每日每夜  我不停讚美</a:t>
             </a:r>
             <a:endParaRPr lang="en-US" altLang="zh-TW" sz="6400" b="1" dirty="0">
               <a:solidFill>
-                <a:srgbClr val="660033"/>
+                <a:srgbClr val="000066"/>
               </a:solidFill>
               <a:latin typeface="微軟正黑體" pitchFamily="34" charset="-120"/>
               <a:ea typeface="微軟正黑體" pitchFamily="34" charset="-120"/>
@@ -3807,56 +3709,16 @@
             <a:r>
               <a:rPr lang="zh-TW" altLang="en-US" sz="6400" b="1" dirty="0">
                 <a:solidFill>
-                  <a:srgbClr val="660033"/>
+                  <a:srgbClr val="000066"/>
                 </a:solidFill>
                 <a:latin typeface="微軟正黑體" pitchFamily="34" charset="-120"/>
                 <a:ea typeface="微軟正黑體" pitchFamily="34" charset="-120"/>
               </a:rPr>
-              <a:t>哈利路</a:t>
-            </a:r>
-            <a:r>
-              <a:rPr lang="zh-TW" altLang="en-US" sz="6400" b="1" dirty="0">
-                <a:solidFill>
-                  <a:srgbClr val="660033"/>
-                </a:solidFill>
-                <a:latin typeface="微軟正黑體" pitchFamily="34" charset="-120"/>
-                <a:ea typeface="微軟正黑體" pitchFamily="34" charset="-120"/>
-              </a:rPr>
-              <a:t>亞  哈</a:t>
-            </a:r>
-            <a:r>
-              <a:rPr lang="zh-TW" altLang="en-US" sz="6400" b="1" dirty="0">
-                <a:solidFill>
-                  <a:srgbClr val="660033"/>
-                </a:solidFill>
-                <a:latin typeface="微軟正黑體" pitchFamily="34" charset="-120"/>
-                <a:ea typeface="微軟正黑體" pitchFamily="34" charset="-120"/>
-              </a:rPr>
-              <a:t>利路</a:t>
-            </a:r>
-            <a:r>
-              <a:rPr lang="zh-TW" altLang="en-US" sz="6400" b="1" dirty="0">
-                <a:solidFill>
-                  <a:srgbClr val="660033"/>
-                </a:solidFill>
-                <a:latin typeface="微軟正黑體" pitchFamily="34" charset="-120"/>
-                <a:ea typeface="微軟正黑體" pitchFamily="34" charset="-120"/>
-              </a:rPr>
-              <a:t>亞  阿</a:t>
-            </a:r>
-            <a:r>
-              <a:rPr lang="zh-TW" altLang="en-US" sz="6400" b="1" dirty="0">
-                <a:solidFill>
-                  <a:srgbClr val="660033"/>
-                </a:solidFill>
-                <a:latin typeface="微軟正黑體" pitchFamily="34" charset="-120"/>
-                <a:ea typeface="微軟正黑體" pitchFamily="34" charset="-120"/>
-              </a:rPr>
-              <a:t>們</a:t>
+              <a:t>哈利路亞  哈利路亞  阿們</a:t>
             </a:r>
             <a:endParaRPr lang="en-US" altLang="zh-TW" sz="6400" b="1" dirty="0">
               <a:solidFill>
-                <a:srgbClr val="660033"/>
+                <a:srgbClr val="000066"/>
               </a:solidFill>
               <a:latin typeface="微軟正黑體" pitchFamily="34" charset="-120"/>
               <a:ea typeface="微軟正黑體" pitchFamily="34" charset="-120"/>
@@ -3872,8 +3734,8 @@
         </p:nvSpPr>
         <p:spPr>
           <a:xfrm>
-            <a:off x="0" y="5157192"/>
-            <a:ext cx="12192000" cy="666786"/>
+            <a:off x="0" y="5157193"/>
+            <a:ext cx="12192000" cy="584775"/>
           </a:xfrm>
           <a:prstGeom prst="rect">
             <a:avLst/>
@@ -3888,9 +3750,9 @@
           <a:p>
             <a:pPr algn="ctr"/>
             <a:r>
-              <a:rPr lang="en-US" sz="3733" b="1" dirty="0">
-                <a:solidFill>
-                  <a:srgbClr val="660033"/>
+              <a:rPr lang="en-US" sz="3200" b="1" dirty="0">
+                <a:solidFill>
+                  <a:srgbClr val="000066"/>
                 </a:solidFill>
                 <a:latin typeface="Microsoft JhengHei" panose="020B0604030504040204" pitchFamily="34" charset="-120"/>
                 <a:ea typeface="Microsoft JhengHei" panose="020B0604030504040204" pitchFamily="34" charset="-120"/>
@@ -3898,28 +3760,28 @@
               <a:t>( </a:t>
             </a:r>
             <a:r>
-              <a:rPr lang="zh-CN" altLang="en-US" sz="3733" b="1" dirty="0">
-                <a:solidFill>
-                  <a:srgbClr val="660033"/>
+              <a:rPr lang="zh-CN" altLang="en-US" sz="3200" b="1" dirty="0">
+                <a:solidFill>
+                  <a:srgbClr val="000066"/>
                 </a:solidFill>
                 <a:latin typeface="Microsoft JhengHei" panose="020B0604030504040204" pitchFamily="34" charset="-120"/>
                 <a:ea typeface="Microsoft JhengHei" panose="020B0604030504040204" pitchFamily="34" charset="-120"/>
               </a:rPr>
-              <a:t>副</a:t>
-            </a:r>
-            <a:r>
-              <a:rPr lang="en-US" sz="3733" b="1" dirty="0">
-                <a:solidFill>
-                  <a:srgbClr val="660033"/>
+              <a:t>副歌</a:t>
+            </a:r>
+            <a:r>
+              <a:rPr lang="en-US" sz="3200" b="1" dirty="0">
+                <a:solidFill>
+                  <a:srgbClr val="000066"/>
                 </a:solidFill>
                 <a:latin typeface="Microsoft JhengHei" panose="020B0604030504040204" pitchFamily="34" charset="-120"/>
                 <a:ea typeface="Microsoft JhengHei" panose="020B0604030504040204" pitchFamily="34" charset="-120"/>
               </a:rPr>
               <a:t> )</a:t>
             </a:r>
-            <a:endParaRPr lang="vi-VN" sz="3733" b="1" dirty="0">
+            <a:endParaRPr lang="vi-VN" sz="3200" b="1" dirty="0">
               <a:solidFill>
-                <a:srgbClr val="660033"/>
+                <a:srgbClr val="000066"/>
               </a:solidFill>
               <a:ea typeface="Microsoft JhengHei" panose="020B0604030504040204" pitchFamily="34" charset="-120"/>
             </a:endParaRPr>
@@ -3929,7 +3791,7 @@
     </p:spTree>
     <p:extLst>
       <p:ext uri="{BB962C8B-B14F-4D97-AF65-F5344CB8AC3E}">
-        <p14:creationId xmlns:p14="http://schemas.microsoft.com/office/powerpoint/2010/main" val="3613916441"/>
+        <p14:creationId xmlns:p14="http://schemas.microsoft.com/office/powerpoint/2010/main" val="3102962047"/>
       </p:ext>
     </p:extLst>
   </p:cSld>
@@ -3940,7 +3802,7 @@
 </file>
 
 <file path=ppt/theme/theme1.xml><?xml version="1.0" encoding="utf-8"?>
-<a:theme xmlns:a="http://schemas.openxmlformats.org/drawingml/2006/main" name="佈景主題1">
+<a:theme xmlns:a="http://schemas.openxmlformats.org/drawingml/2006/main" name="Theme1">
   <a:themeElements>
     <a:clrScheme name="Office">
       <a:dk1>
@@ -4219,5 +4081,10 @@
   </a:themeElements>
   <a:objectDefaults/>
   <a:extraClrSchemeLst/>
+  <a:extLst>
+    <a:ext uri="{05A4C25C-085E-4340-85A3-A5531E510DB2}">
+      <thm15:themeFamily xmlns:thm15="http://schemas.microsoft.com/office/thememl/2012/main" name="Theme1" id="{75BBF97F-0525-4D7F-ABA1-4CCFA07F43A2}" vid="{8D3552C7-B8E4-422B-9896-C8F00D815D11}"/>
+    </a:ext>
+  </a:extLst>
 </a:theme>
 </file>